--- a/Bikin-Website/M01-Apa-yang-Akan-Kita-Bangun/BW-M01-Apa-yang-Akan-Kita-Bangun.pptx
+++ b/Bikin-Website/M01-Apa-yang-Akan-Kita-Bangun/BW-M01-Apa-yang-Akan-Kita-Bangun.pptx
@@ -4446,18 +4446,121 @@
       </p:sp>
       <p:sp>
         <p:nvSpPr>
-          <p:cNvPr id="7" name="Shape 5"/>
+          <p:cNvPr id="7" name="Text 5"/>
+          <p:cNvSpPr txBox="1"/>
+          <p:nvPr/>
+        </p:nvSpPr>
+        <p:spPr>
+          <a:xfrm>
+            <a:off x="502920" y="1920240"/>
+            <a:ext cx="11183112" cy="274320"/>
+          </a:xfrm>
+          <a:prstGeom prst="rect">
+            <a:avLst/>
+          </a:prstGeom>
+          <a:noFill/>
+          <a:ln/>
+        </p:spPr>
+        <p:txBody>
+          <a:bodyPr wrap="square" lIns="0" tIns="0" rIns="0" bIns="0" rtlCol="0" anchor="ctr"/>
+          <a:lstStyle/>
+          <a:p>
+            <a:pPr indent="0" marL="0">
+              <a:buNone/>
+            </a:pPr>
+            <a:r>
+              <a:rPr lang="en-US" sz="1250" b="1" spc="40" kern="0" dirty="0">
+                <a:solidFill>
+                  <a:srgbClr val="4B36C7"/>
+                </a:solidFill>
+                <a:latin typeface="Helvetica" pitchFamily="34" charset="0"/>
+                <a:ea typeface="Helvetica" pitchFamily="34" charset="-122"/>
+                <a:cs typeface="Helvetica" pitchFamily="34" charset="-120"/>
+              </a:rPr>
+              <a:t>CONTOH PROMPT UNTUK MEMULAI</a:t>
+            </a:r>
+            <a:endParaRPr lang="en-US" sz="1250" dirty="0"/>
+          </a:p>
+        </p:txBody>
+      </p:sp>
+      <p:sp>
+        <p:nvSpPr>
+          <p:cNvPr id="8" name="Shape 6"/>
           <p:cNvSpPr/>
           <p:nvPr/>
         </p:nvSpPr>
         <p:spPr>
           <a:xfrm>
-            <a:off x="502920" y="1920240"/>
-            <a:ext cx="11183112" cy="1386840"/>
+            <a:off x="502920" y="2231136"/>
+            <a:ext cx="11183112" cy="1021461"/>
           </a:xfrm>
           <a:prstGeom prst="roundRect">
             <a:avLst>
-              <a:gd name="adj" fmla="val 7912"/>
+              <a:gd name="adj" fmla="val 7162"/>
+            </a:avLst>
+          </a:prstGeom>
+          <a:solidFill>
+            <a:srgbClr val="0D1321"/>
+          </a:solidFill>
+          <a:ln/>
+        </p:spPr>
+      </p:sp>
+      <p:sp>
+        <p:nvSpPr>
+          <p:cNvPr id="9" name="Text 7"/>
+          <p:cNvSpPr txBox="1"/>
+          <p:nvPr/>
+        </p:nvSpPr>
+        <p:spPr>
+          <a:xfrm>
+            <a:off x="731520" y="2432304"/>
+            <a:ext cx="10725912" cy="619125"/>
+          </a:xfrm>
+          <a:prstGeom prst="rect">
+            <a:avLst/>
+          </a:prstGeom>
+          <a:noFill/>
+          <a:ln/>
+        </p:spPr>
+        <p:txBody>
+          <a:bodyPr wrap="square" lIns="0" tIns="0" rIns="0" bIns="0" rtlCol="0" anchor="ctr"/>
+          <a:lstStyle/>
+          <a:p>
+            <a:pPr indent="0" marL="0">
+              <a:lnSpc>
+                <a:spcPct val="130000"/>
+              </a:lnSpc>
+              <a:buNone/>
+            </a:pPr>
+            <a:r>
+              <a:rPr lang="en-US" sz="1250" i="1" dirty="0">
+                <a:solidFill>
+                  <a:srgbClr val="FFFFFF"/>
+                </a:solidFill>
+                <a:latin typeface="Helvetica" pitchFamily="34" charset="0"/>
+                <a:ea typeface="Helvetica" pitchFamily="34" charset="-122"/>
+                <a:cs typeface="Helvetica" pitchFamily="34" charset="-120"/>
+              </a:rPr>
+              <a:t>Saya mau bikin [katalog online untuk toko saya / portfolio pribadi / landing page bisnis]. Ini gambaran singkatnya: [jelaskan jenis produk/jasa, atau jenis portfolio yang kamu mau]. Target pengunjungnya adalah [siapa]. Bantu saya pikirkan: halaman apa saja yang kira-kira saya butuhkan?</a:t>
+            </a:r>
+            <a:endParaRPr lang="en-US" sz="1250" dirty="0"/>
+          </a:p>
+        </p:txBody>
+      </p:sp>
+      <p:sp>
+        <p:nvSpPr>
+          <p:cNvPr id="10" name="Shape 8"/>
+          <p:cNvSpPr/>
+          <p:nvPr/>
+        </p:nvSpPr>
+        <p:spPr>
+          <a:xfrm>
+            <a:off x="502920" y="3481197"/>
+            <a:ext cx="11183112" cy="1183640"/>
+          </a:xfrm>
+          <a:prstGeom prst="roundRect">
+            <a:avLst>
+              <a:gd name="adj" fmla="val 9270"/>
             </a:avLst>
           </a:prstGeom>
           <a:solidFill>
@@ -4473,13 +4576,13 @@
       </p:sp>
       <p:sp>
         <p:nvSpPr>
-          <p:cNvPr id="8" name="Text 6"/>
-          <p:cNvSpPr txBox="1"/>
-          <p:nvPr/>
-        </p:nvSpPr>
-        <p:spPr>
-          <a:xfrm>
-            <a:off x="740664" y="2103120"/>
+          <p:cNvPr id="11" name="Text 9"/>
+          <p:cNvSpPr txBox="1"/>
+          <p:nvPr/>
+        </p:nvSpPr>
+        <p:spPr>
+          <a:xfrm>
+            <a:off x="740664" y="3664077"/>
             <a:ext cx="10707624" cy="274320"/>
           </a:xfrm>
           <a:prstGeom prst="rect">
@@ -4512,14 +4615,14 @@
       </p:sp>
       <p:sp>
         <p:nvSpPr>
-          <p:cNvPr id="9" name="Text 7"/>
-          <p:cNvSpPr txBox="1"/>
-          <p:nvPr/>
-        </p:nvSpPr>
-        <p:spPr>
-          <a:xfrm>
-            <a:off x="740664" y="2468880"/>
-            <a:ext cx="10707624" cy="609600"/>
+          <p:cNvPr id="12" name="Text 10"/>
+          <p:cNvSpPr txBox="1"/>
+          <p:nvPr/>
+        </p:nvSpPr>
+        <p:spPr>
+          <a:xfrm>
+            <a:off x="740664" y="4029837"/>
+            <a:ext cx="10707624" cy="406400"/>
           </a:xfrm>
           <a:prstGeom prst="rect">
             <a:avLst/>
@@ -4546,7 +4649,7 @@
                 <a:ea typeface="Helvetica" pitchFamily="34" charset="-122"/>
                 <a:cs typeface="Helvetica" pitchFamily="34" charset="-120"/>
               </a:rPr>
-              <a:t>Tentukan dulu: kalau kamu mau ikut studi kasus katalog toko, siapkan jenis produk yang mau dikatalogkan. Kalau kamu mau bikin portfolio atau situs lain, tentukan tujuannya sekarang. Lalu minta Claude membantumu memikirkan halaman apa saja yang dibutuhkan, berdasarkan jenis situs, gambaran singkat, dan target pengunjungnya.</a:t>
+              <a:t>Tentukan dulu: kalau kamu mau ikut studi kasus katalog toko, siapkan jenis produk yang mau dikatalogkan. Kalau kamu mau bikin portfolio atau situs lain, tentukan tujuannya sekarang. Lalu kirim prompt di atas ke Claude (isi bagian dalam kurung siku sesuai situasimu).</a:t>
             </a:r>
             <a:endParaRPr lang="en-US" sz="1250" dirty="0"/>
           </a:p>
@@ -4554,13 +4657,13 @@
       </p:sp>
       <p:sp>
         <p:nvSpPr>
-          <p:cNvPr id="10" name="Shape 8"/>
+          <p:cNvPr id="13" name="Shape 11"/>
           <p:cNvSpPr/>
           <p:nvPr/>
         </p:nvSpPr>
         <p:spPr>
           <a:xfrm>
-            <a:off x="502920" y="3535680"/>
+            <a:off x="502920" y="4893437"/>
             <a:ext cx="11183112" cy="1042099"/>
           </a:xfrm>
           <a:prstGeom prst="roundRect">
@@ -4581,13 +4684,13 @@
       </p:sp>
       <p:sp>
         <p:nvSpPr>
-          <p:cNvPr id="11" name="Shape 9"/>
+          <p:cNvPr id="14" name="Shape 12"/>
           <p:cNvSpPr/>
           <p:nvPr/>
         </p:nvSpPr>
         <p:spPr>
           <a:xfrm>
-            <a:off x="722376" y="3718560"/>
+            <a:off x="722376" y="5076317"/>
             <a:ext cx="365760" cy="365760"/>
           </a:xfrm>
           <a:prstGeom prst="ellipse">
@@ -4601,13 +4704,13 @@
       </p:sp>
       <p:sp>
         <p:nvSpPr>
-          <p:cNvPr id="12" name="Text 10"/>
-          <p:cNvSpPr txBox="1"/>
-          <p:nvPr/>
-        </p:nvSpPr>
-        <p:spPr>
-          <a:xfrm>
-            <a:off x="722376" y="3718560"/>
+          <p:cNvPr id="15" name="Text 13"/>
+          <p:cNvSpPr txBox="1"/>
+          <p:nvPr/>
+        </p:nvSpPr>
+        <p:spPr>
+          <a:xfrm>
+            <a:off x="722376" y="5076317"/>
             <a:ext cx="365760" cy="365760"/>
           </a:xfrm>
           <a:prstGeom prst="rect">
@@ -4640,13 +4743,13 @@
       </p:sp>
       <p:sp>
         <p:nvSpPr>
-          <p:cNvPr id="13" name="Text 11"/>
-          <p:cNvSpPr txBox="1"/>
-          <p:nvPr/>
-        </p:nvSpPr>
-        <p:spPr>
-          <a:xfrm>
-            <a:off x="1234440" y="3791712"/>
+          <p:cNvPr id="16" name="Text 14"/>
+          <p:cNvSpPr txBox="1"/>
+          <p:nvPr/>
+        </p:nvSpPr>
+        <p:spPr>
+          <a:xfrm>
+            <a:off x="1234440" y="5149469"/>
             <a:ext cx="10268712" cy="274320"/>
           </a:xfrm>
           <a:prstGeom prst="rect">
@@ -4679,13 +4782,13 @@
       </p:sp>
       <p:sp>
         <p:nvSpPr>
-          <p:cNvPr id="14" name="Text 12"/>
-          <p:cNvSpPr txBox="1"/>
-          <p:nvPr/>
-        </p:nvSpPr>
-        <p:spPr>
-          <a:xfrm>
-            <a:off x="722376" y="4194048"/>
+          <p:cNvPr id="17" name="Text 15"/>
+          <p:cNvSpPr txBox="1"/>
+          <p:nvPr/>
+        </p:nvSpPr>
+        <p:spPr>
+          <a:xfrm>
+            <a:off x="722376" y="5551805"/>
             <a:ext cx="10744200" cy="182563"/>
           </a:xfrm>
           <a:prstGeom prst="rect">

--- a/Bikin-Website/M01-Apa-yang-Akan-Kita-Bangun/BW-M01-Apa-yang-Akan-Kita-Bangun.pptx
+++ b/Bikin-Website/M01-Apa-yang-Akan-Kita-Bangun/BW-M01-Apa-yang-Akan-Kita-Bangun.pptx
@@ -4,19 +4,20 @@
   <p:sldMasterIdLst>
     <p:sldMasterId id="2147483648" r:id="rId1"/>
   </p:sldMasterIdLst>
+  <p:notesMasterIdLst>
+    <p:notesMasterId r:id="rId8"/>
+  </p:notesMasterIdLst>
   <p:sldIdLst>
     <p:sldId id="256" r:id="rId2"/>
     <p:sldId id="257" r:id="rId3"/>
     <p:sldId id="258" r:id="rId4"/>
     <p:sldId id="259" r:id="rId5"/>
+    <p:sldId id="262" r:id="rId13"/>
     <p:sldId id="260" r:id="rId6"/>
     <p:sldId id="261" r:id="rId7"/>
   </p:sldIdLst>
-  <p:notesMasterIdLst>
-    <p:notesMasterId r:id="rId8"/>
-  </p:notesMasterIdLst>
-  <p:sldSz cx="12191695" cy="6858000"/>
-  <p:notesSz cx="6858000" cy="12191695"/>
+  <p:sldSz cx="12192000" cy="6858000"/>
+  <p:notesSz cx="6858000" cy="12192000"/>
   <p:defaultTextStyle>
     <a:lvl1pPr marL="0" algn="l" defTabSz="914400" rtl="0" eaLnBrk="1" latinLnBrk="0" hangingPunct="1">
       <a:defRPr sz="1800" kern="1200">
@@ -109,6 +110,11 @@
       </a:defRPr>
     </a:lvl9pPr>
   </p:defaultTextStyle>
+  <p:extLst>
+    <p:ext uri="{EFAFB233-063F-42B5-8137-9DF3F51BA10A}">
+      <p15:sldGuideLst xmlns:p15="http://schemas.microsoft.com/office/powerpoint/2012/main"/>
+    </p:ext>
+  </p:extLst>
 </p:presentation>
 </file>
 
@@ -134,234 +140,10 @@
           <a:chExt cx="0" cy="0"/>
         </a:xfrm>
       </p:grpSpPr>
-      <p:sp>
-        <p:nvSpPr>
-          <p:cNvPr id="2" name="Header Placeholder 1"/>
-          <p:cNvSpPr>
-            <a:spLocks noGrp="1"/>
-          </p:cNvSpPr>
-          <p:nvPr>
-            <p:ph type="hdr" sz="quarter"/>
-          </p:nvPr>
-        </p:nvSpPr>
-        <p:spPr>
-          <a:xfrm>
-            <a:off x="0" y="0"/>
-            <a:ext cx="2971800" cy="458788"/>
-          </a:xfrm>
-          <a:prstGeom prst="rect">
-            <a:avLst/>
-          </a:prstGeom>
-        </p:spPr>
-        <p:txBody>
-          <a:bodyPr vert="horz" lIns="91440" tIns="45720" rIns="91440" bIns="45720" rtlCol="0"/>
-          <a:lstStyle>
-            <a:lvl1pPr algn="l">
-              <a:defRPr sz="1200"/>
-            </a:lvl1pPr>
-          </a:lstStyle>
-          <a:p>
-            <a:endParaRPr lang="en-US"/>
-          </a:p>
-        </p:txBody>
-      </p:sp>
-      <p:sp>
-        <p:nvSpPr>
-          <p:cNvPr id="3" name="Date Placeholder 2"/>
-          <p:cNvSpPr>
-            <a:spLocks noGrp="1"/>
-          </p:cNvSpPr>
-          <p:nvPr>
-            <p:ph type="dt" idx="1"/>
-          </p:nvPr>
-        </p:nvSpPr>
-        <p:spPr>
-          <a:xfrm>
-            <a:off x="3884613" y="0"/>
-            <a:ext cx="2971800" cy="458788"/>
-          </a:xfrm>
-          <a:prstGeom prst="rect">
-            <a:avLst/>
-          </a:prstGeom>
-        </p:spPr>
-        <p:txBody>
-          <a:bodyPr vert="horz" lIns="91440" tIns="45720" rIns="91440" bIns="45720" rtlCol="0"/>
-          <a:lstStyle>
-            <a:lvl1pPr algn="r">
-              <a:defRPr sz="1200"/>
-            </a:lvl1pPr>
-          </a:lstStyle>
-          <a:p>
-            <a:fld id="{5282F153-3F37-0F45-9E97-73ACFA13230C}" type="datetimeFigureOut">
-              <a:rPr lang="en-US"/>
-              <a:t>7/23/19</a:t>
-            </a:fld>
-            <a:endParaRPr lang="en-US"/>
-          </a:p>
-        </p:txBody>
-      </p:sp>
-      <p:sp>
-        <p:nvSpPr>
-          <p:cNvPr id="4" name="Slide Image Placeholder 3"/>
-          <p:cNvSpPr>
-            <a:spLocks noGrp="1" noRot="1" noChangeAspect="1"/>
-          </p:cNvSpPr>
-          <p:nvPr>
-            <p:ph type="sldImg" idx="2"/>
-          </p:nvPr>
-        </p:nvSpPr>
-        <p:spPr>
-          <a:xfrm>
-            <a:off x="685800" y="1143000"/>
-            <a:ext cx="5486400" cy="3086100"/>
-          </a:xfrm>
-          <a:prstGeom prst="rect">
-            <a:avLst/>
-          </a:prstGeom>
-          <a:noFill/>
-          <a:ln w="12700">
-            <a:solidFill>
-              <a:prstClr val="black"/>
-            </a:solidFill>
-          </a:ln>
-        </p:spPr>
-        <p:txBody>
-          <a:bodyPr vert="horz" lIns="91440" tIns="45720" rIns="91440" bIns="45720" rtlCol="0" anchor="ctr"/>
-          <a:lstStyle/>
-          <a:p>
-            <a:endParaRPr lang="en-US"/>
-          </a:p>
-        </p:txBody>
-      </p:sp>
-      <p:sp>
-        <p:nvSpPr>
-          <p:cNvPr id="5" name="Notes Placeholder 4"/>
-          <p:cNvSpPr>
-            <a:spLocks noGrp="1"/>
-          </p:cNvSpPr>
-          <p:nvPr>
-            <p:ph type="body" sz="quarter" idx="3"/>
-          </p:nvPr>
-        </p:nvSpPr>
-        <p:spPr>
-          <a:xfrm>
-            <a:off x="685800" y="4400550"/>
-            <a:ext cx="5486400" cy="3600450"/>
-          </a:xfrm>
-          <a:prstGeom prst="rect">
-            <a:avLst/>
-          </a:prstGeom>
-        </p:spPr>
-        <p:txBody>
-          <a:bodyPr vert="horz" lIns="91440" tIns="45720" rIns="91440" bIns="45720" rtlCol="0"/>
-          <a:lstStyle/>
-          <a:p>
-            <a:pPr lvl="0"/>
-            <a:r>
-              <a:rPr lang="en-US"/>
-              <a:t>Click to edit Master text styles</a:t>
-            </a:r>
-          </a:p>
-          <a:p>
-            <a:pPr lvl="1"/>
-            <a:r>
-              <a:rPr lang="en-US"/>
-              <a:t>Second level</a:t>
-            </a:r>
-          </a:p>
-          <a:p>
-            <a:pPr lvl="2"/>
-            <a:r>
-              <a:rPr lang="en-US"/>
-              <a:t>Third level</a:t>
-            </a:r>
-          </a:p>
-          <a:p>
-            <a:pPr lvl="3"/>
-            <a:r>
-              <a:rPr lang="en-US"/>
-              <a:t>Fourth level</a:t>
-            </a:r>
-          </a:p>
-          <a:p>
-            <a:pPr lvl="4"/>
-            <a:r>
-              <a:rPr lang="en-US"/>
-              <a:t>Fifth level</a:t>
-            </a:r>
-          </a:p>
-        </p:txBody>
-      </p:sp>
-      <p:sp>
-        <p:nvSpPr>
-          <p:cNvPr id="6" name="Footer Placeholder 5"/>
-          <p:cNvSpPr>
-            <a:spLocks noGrp="1"/>
-          </p:cNvSpPr>
-          <p:nvPr>
-            <p:ph type="ftr" sz="quarter" idx="4"/>
-          </p:nvPr>
-        </p:nvSpPr>
-        <p:spPr>
-          <a:xfrm>
-            <a:off x="0" y="8685213"/>
-            <a:ext cx="2971800" cy="458787"/>
-          </a:xfrm>
-          <a:prstGeom prst="rect">
-            <a:avLst/>
-          </a:prstGeom>
-        </p:spPr>
-        <p:txBody>
-          <a:bodyPr vert="horz" lIns="91440" tIns="45720" rIns="91440" bIns="45720" rtlCol="0" anchor="b"/>
-          <a:lstStyle>
-            <a:lvl1pPr algn="l">
-              <a:defRPr sz="1200"/>
-            </a:lvl1pPr>
-          </a:lstStyle>
-          <a:p>
-            <a:endParaRPr lang="en-US"/>
-          </a:p>
-        </p:txBody>
-      </p:sp>
-      <p:sp>
-        <p:nvSpPr>
-          <p:cNvPr id="7" name="Slide Number Placeholder 6"/>
-          <p:cNvSpPr>
-            <a:spLocks noGrp="1"/>
-          </p:cNvSpPr>
-          <p:nvPr>
-            <p:ph type="sldNum" sz="quarter" idx="5"/>
-          </p:nvPr>
-        </p:nvSpPr>
-        <p:spPr>
-          <a:xfrm>
-            <a:off x="3884613" y="8685213"/>
-            <a:ext cx="2971800" cy="458787"/>
-          </a:xfrm>
-          <a:prstGeom prst="rect">
-            <a:avLst/>
-          </a:prstGeom>
-        </p:spPr>
-        <p:txBody>
-          <a:bodyPr vert="horz" lIns="91440" tIns="45720" rIns="91440" bIns="45720" rtlCol="0" anchor="b"/>
-          <a:lstStyle>
-            <a:lvl1pPr algn="r">
-              <a:defRPr sz="1200"/>
-            </a:lvl1pPr>
-          </a:lstStyle>
-          <a:p>
-            <a:fld id="{CE5E9CC1-C706-0F49-92D6-E571CC5EEA8F}" type="slidenum">
-              <a:rPr lang="en-US"/>
-              <a:t>‹#›</a:t>
-            </a:fld>
-            <a:endParaRPr lang="en-US"/>
-          </a:p>
-        </p:txBody>
-      </p:sp>
     </p:spTree>
     <p:extLst>
       <p:ext uri="{BB962C8B-B14F-4D97-AF65-F5344CB8AC3E}">
-        <p14:creationId xmlns:p14="http://schemas.microsoft.com/office/powerpoint/2010/main" val="1024086991"/>
+        <p14:creationId xmlns:p14="http://schemas.microsoft.com/office/powerpoint/2010/main" val="3845460393"/>
       </p:ext>
     </p:extLst>
   </p:cSld>
@@ -505,10 +287,6 @@
           <a:bodyPr/>
           <a:lstStyle/>
           <a:p>
-            <a:r>
-              <a:rPr lang="en-US" dirty="0"/>
-              <a:t/>
-            </a:r>
             <a:endParaRPr lang="en-US" dirty="0"/>
           </a:p>
         </p:txBody>
@@ -593,10 +371,6 @@
           <a:bodyPr/>
           <a:lstStyle/>
           <a:p>
-            <a:r>
-              <a:rPr lang="en-US" dirty="0"/>
-              <a:t/>
-            </a:r>
             <a:endParaRPr lang="en-US" dirty="0"/>
           </a:p>
         </p:txBody>
@@ -681,10 +455,6 @@
           <a:bodyPr/>
           <a:lstStyle/>
           <a:p>
-            <a:r>
-              <a:rPr lang="en-US" dirty="0"/>
-              <a:t/>
-            </a:r>
             <a:endParaRPr lang="en-US" dirty="0"/>
           </a:p>
         </p:txBody>
@@ -769,10 +539,6 @@
           <a:bodyPr/>
           <a:lstStyle/>
           <a:p>
-            <a:r>
-              <a:rPr lang="en-US" dirty="0"/>
-              <a:t/>
-            </a:r>
             <a:endParaRPr lang="en-US" dirty="0"/>
           </a:p>
         </p:txBody>
@@ -857,10 +623,6 @@
           <a:bodyPr/>
           <a:lstStyle/>
           <a:p>
-            <a:r>
-              <a:rPr lang="en-US" dirty="0"/>
-              <a:t/>
-            </a:r>
             <a:endParaRPr lang="en-US" dirty="0"/>
           </a:p>
         </p:txBody>
@@ -945,10 +707,6 @@
           <a:bodyPr/>
           <a:lstStyle/>
           <a:p>
-            <a:r>
-              <a:rPr lang="en-US" dirty="0"/>
-              <a:t/>
-            </a:r>
             <a:endParaRPr lang="en-US" dirty="0"/>
           </a:p>
         </p:txBody>
@@ -1022,6 +780,11 @@
 <file path=ppt/slideMasters/slideMaster1.xml><?xml version="1.0" encoding="utf-8"?>
 <p:sldMaster xmlns:a="http://schemas.openxmlformats.org/drawingml/2006/main" xmlns:r="http://schemas.openxmlformats.org/officeDocument/2006/relationships" xmlns:p="http://schemas.openxmlformats.org/presentationml/2006/main">
   <p:cSld>
+    <p:bg>
+      <p:bgRef idx="1001">
+        <a:schemeClr val="bg1"/>
+      </p:bgRef>
+    </p:bg>
     <p:spTree>
       <p:nvGrpSpPr>
         <p:cNvPr id="1" name=""/>
@@ -1304,6 +1067,7 @@
         <a:solidFill>
           <a:srgbClr val="0D1321"/>
         </a:solidFill>
+        <a:effectLst/>
       </p:bgPr>
     </p:bg>
     <p:spTree>
@@ -1339,6 +1103,13 @@
           </a:solidFill>
           <a:ln/>
         </p:spPr>
+        <p:txBody>
+          <a:bodyPr/>
+          <a:lstStyle/>
+          <a:p>
+            <a:endParaRPr lang="en-ID"/>
+          </a:p>
+        </p:txBody>
       </p:sp>
       <p:sp>
         <p:nvSpPr>
@@ -1361,7 +1132,7 @@
           <a:bodyPr wrap="square" lIns="0" tIns="0" rIns="0" bIns="0" rtlCol="0" anchor="ctr"/>
           <a:lstStyle/>
           <a:p>
-            <a:pPr indent="0" marL="0">
+            <a:pPr marL="0" indent="0">
               <a:buNone/>
             </a:pPr>
             <a:r>
@@ -1375,9 +1146,6 @@
               </a:rPr>
               <a:t>belajar</a:t>
             </a:r>
-            <a:pPr indent="0" marL="0">
-              <a:buNone/>
-            </a:pPr>
             <a:r>
               <a:rPr lang="en-US" sz="2000" b="1" dirty="0">
                 <a:solidFill>
@@ -1414,6 +1182,13 @@
           </a:solidFill>
           <a:ln/>
         </p:spPr>
+        <p:txBody>
+          <a:bodyPr/>
+          <a:lstStyle/>
+          <a:p>
+            <a:endParaRPr lang="en-ID"/>
+          </a:p>
+        </p:txBody>
       </p:sp>
       <p:sp>
         <p:nvSpPr>
@@ -1436,7 +1211,7 @@
           <a:bodyPr wrap="square" lIns="0" tIns="0" rIns="0" bIns="0" rtlCol="0" anchor="ctr"/>
           <a:lstStyle/>
           <a:p>
-            <a:pPr algn="ctr" indent="0" marL="0">
+            <a:pPr marL="0" indent="0" algn="ctr">
               <a:buNone/>
             </a:pPr>
             <a:r>
@@ -1475,7 +1250,7 @@
           <a:bodyPr wrap="square" lIns="0" tIns="0" rIns="0" bIns="0" rtlCol="0" anchor="b"/>
           <a:lstStyle/>
           <a:p>
-            <a:pPr indent="0" marL="0">
+            <a:pPr marL="0" indent="0">
               <a:lnSpc>
                 <a:spcPts val="5000"/>
               </a:lnSpc>
@@ -1495,7 +1270,7 @@
             <a:endParaRPr lang="en-US" sz="4400" dirty="0"/>
           </a:p>
           <a:p>
-            <a:pPr indent="0" marL="0">
+            <a:pPr marL="0" indent="0">
               <a:lnSpc>
                 <a:spcPts val="5000"/>
               </a:lnSpc>
@@ -1537,7 +1312,7 @@
           <a:bodyPr wrap="square" lIns="0" tIns="0" rIns="0" bIns="0" rtlCol="0" anchor="ctr"/>
           <a:lstStyle/>
           <a:p>
-            <a:pPr indent="0" marL="0">
+            <a:pPr marL="0" indent="0">
               <a:lnSpc>
                 <a:spcPct val="130000"/>
               </a:lnSpc>
@@ -1579,7 +1354,7 @@
           <a:bodyPr wrap="square" lIns="0" tIns="0" rIns="0" bIns="0" rtlCol="0" anchor="ctr"/>
           <a:lstStyle/>
           <a:p>
-            <a:pPr indent="0" marL="0">
+            <a:pPr marL="0" indent="0">
               <a:buNone/>
             </a:pPr>
             <a:r>
@@ -1613,6 +1388,7 @@
         <a:solidFill>
           <a:srgbClr val="FFFFFF"/>
         </a:solidFill>
+        <a:effectLst/>
       </p:bgPr>
     </p:bg>
     <p:spTree>
@@ -1648,6 +1424,13 @@
           </a:solidFill>
           <a:ln/>
         </p:spPr>
+        <p:txBody>
+          <a:bodyPr/>
+          <a:lstStyle/>
+          <a:p>
+            <a:endParaRPr lang="en-ID"/>
+          </a:p>
+        </p:txBody>
       </p:sp>
       <p:sp>
         <p:nvSpPr>
@@ -1668,6 +1451,13 @@
           </a:solidFill>
           <a:ln/>
         </p:spPr>
+        <p:txBody>
+          <a:bodyPr/>
+          <a:lstStyle/>
+          <a:p>
+            <a:endParaRPr lang="en-ID"/>
+          </a:p>
+        </p:txBody>
       </p:sp>
       <p:sp>
         <p:nvSpPr>
@@ -1690,7 +1480,7 @@
           <a:bodyPr wrap="square" lIns="0" tIns="0" rIns="0" bIns="0" rtlCol="0" anchor="ctr"/>
           <a:lstStyle/>
           <a:p>
-            <a:pPr indent="0" marL="0">
+            <a:pPr marL="0" indent="0">
               <a:buNone/>
             </a:pPr>
             <a:r>
@@ -1704,9 +1494,6 @@
               </a:rPr>
               <a:t>belajar</a:t>
             </a:r>
-            <a:pPr indent="0" marL="0">
-              <a:buNone/>
-            </a:pPr>
             <a:r>
               <a:rPr lang="en-US" sz="2000" b="1" dirty="0">
                 <a:solidFill>
@@ -1743,7 +1530,7 @@
           <a:bodyPr wrap="square" lIns="0" tIns="0" rIns="0" bIns="0" rtlCol="0" anchor="ctr"/>
           <a:lstStyle/>
           <a:p>
-            <a:pPr algn="r" indent="0" marL="0">
+            <a:pPr marL="0" indent="0" algn="r">
               <a:buNone/>
             </a:pPr>
             <a:r>
@@ -1782,7 +1569,7 @@
           <a:bodyPr wrap="square" lIns="0" tIns="0" rIns="0" bIns="0" rtlCol="0" anchor="ctr"/>
           <a:lstStyle/>
           <a:p>
-            <a:pPr indent="0" marL="0">
+            <a:pPr marL="0" indent="0">
               <a:buNone/>
             </a:pPr>
             <a:r>
@@ -1821,7 +1608,7 @@
           <a:bodyPr wrap="square" lIns="0" tIns="0" rIns="0" bIns="0" rtlCol="0" anchor="ctr"/>
           <a:lstStyle/>
           <a:p>
-            <a:pPr indent="0" marL="0">
+            <a:pPr marL="0" indent="0">
               <a:lnSpc>
                 <a:spcPct val="125000"/>
               </a:lnSpc>
@@ -1868,6 +1655,13 @@
             <a:prstDash val="solid"/>
           </a:ln>
         </p:spPr>
+        <p:txBody>
+          <a:bodyPr/>
+          <a:lstStyle/>
+          <a:p>
+            <a:endParaRPr lang="en-ID"/>
+          </a:p>
+        </p:txBody>
       </p:sp>
       <p:sp>
         <p:nvSpPr>
@@ -1890,7 +1684,7 @@
           <a:bodyPr wrap="square" lIns="0" tIns="0" rIns="0" bIns="0" rtlCol="0" anchor="ctr"/>
           <a:lstStyle/>
           <a:p>
-            <a:pPr indent="0" marL="0">
+            <a:pPr marL="0" indent="0">
               <a:buNone/>
             </a:pPr>
             <a:r>
@@ -2052,6 +1846,13 @@
             <a:prstDash val="solid"/>
           </a:ln>
         </p:spPr>
+        <p:txBody>
+          <a:bodyPr/>
+          <a:lstStyle/>
+          <a:p>
+            <a:endParaRPr lang="en-ID"/>
+          </a:p>
+        </p:txBody>
       </p:sp>
       <p:sp>
         <p:nvSpPr>
@@ -2074,7 +1875,7 @@
           <a:bodyPr wrap="square" lIns="0" tIns="0" rIns="0" bIns="0" rtlCol="0" anchor="ctr"/>
           <a:lstStyle/>
           <a:p>
-            <a:pPr indent="0" marL="0">
+            <a:pPr marL="0" indent="0">
               <a:buNone/>
             </a:pPr>
             <a:r>
@@ -2212,6 +2013,13 @@
             <a:prstDash val="solid"/>
           </a:ln>
         </p:spPr>
+        <p:txBody>
+          <a:bodyPr/>
+          <a:lstStyle/>
+          <a:p>
+            <a:endParaRPr lang="en-ID"/>
+          </a:p>
+        </p:txBody>
       </p:sp>
       <p:sp>
         <p:nvSpPr>
@@ -2234,11 +2042,11 @@
           <a:bodyPr wrap="square" lIns="0" tIns="0" rIns="0" bIns="0" rtlCol="0" anchor="ctr"/>
           <a:lstStyle/>
           <a:p>
-            <a:pPr indent="0" marL="0">
-              <a:buNone/>
-            </a:pPr>
-            <a:r>
-              <a:rPr lang="en-US" sz="1150" b="1" spc="30" kern="0" dirty="0">
+            <a:pPr marL="0" indent="0">
+              <a:buNone/>
+            </a:pPr>
+            <a:r>
+              <a:rPr lang="en-US" sz="1150" b="1" kern="0" spc="30" dirty="0">
                 <a:solidFill>
                   <a:srgbClr val="4B36C7"/>
                 </a:solidFill>
@@ -2273,7 +2081,7 @@
           <a:bodyPr wrap="square" lIns="0" tIns="0" rIns="0" bIns="0" rtlCol="0" anchor="ctr"/>
           <a:lstStyle/>
           <a:p>
-            <a:pPr indent="0" marL="0">
+            <a:pPr marL="0" indent="0">
               <a:lnSpc>
                 <a:spcPct val="125000"/>
               </a:lnSpc>
@@ -2310,6 +2118,7 @@
         <a:solidFill>
           <a:srgbClr val="FFFFFF"/>
         </a:solidFill>
+        <a:effectLst/>
       </p:bgPr>
     </p:bg>
     <p:spTree>
@@ -2345,6 +2154,13 @@
           </a:solidFill>
           <a:ln/>
         </p:spPr>
+        <p:txBody>
+          <a:bodyPr/>
+          <a:lstStyle/>
+          <a:p>
+            <a:endParaRPr lang="en-ID"/>
+          </a:p>
+        </p:txBody>
       </p:sp>
       <p:sp>
         <p:nvSpPr>
@@ -2365,6 +2181,13 @@
           </a:solidFill>
           <a:ln/>
         </p:spPr>
+        <p:txBody>
+          <a:bodyPr/>
+          <a:lstStyle/>
+          <a:p>
+            <a:endParaRPr lang="en-ID"/>
+          </a:p>
+        </p:txBody>
       </p:sp>
       <p:sp>
         <p:nvSpPr>
@@ -2387,7 +2210,7 @@
           <a:bodyPr wrap="square" lIns="0" tIns="0" rIns="0" bIns="0" rtlCol="0" anchor="ctr"/>
           <a:lstStyle/>
           <a:p>
-            <a:pPr indent="0" marL="0">
+            <a:pPr marL="0" indent="0">
               <a:buNone/>
             </a:pPr>
             <a:r>
@@ -2401,9 +2224,6 @@
               </a:rPr>
               <a:t>belajar</a:t>
             </a:r>
-            <a:pPr indent="0" marL="0">
-              <a:buNone/>
-            </a:pPr>
             <a:r>
               <a:rPr lang="en-US" sz="2000" b="1" dirty="0">
                 <a:solidFill>
@@ -2440,7 +2260,7 @@
           <a:bodyPr wrap="square" lIns="0" tIns="0" rIns="0" bIns="0" rtlCol="0" anchor="ctr"/>
           <a:lstStyle/>
           <a:p>
-            <a:pPr algn="r" indent="0" marL="0">
+            <a:pPr marL="0" indent="0" algn="r">
               <a:buNone/>
             </a:pPr>
             <a:r>
@@ -2479,7 +2299,7 @@
           <a:bodyPr wrap="square" lIns="0" tIns="0" rIns="0" bIns="0" rtlCol="0" anchor="ctr"/>
           <a:lstStyle/>
           <a:p>
-            <a:pPr indent="0" marL="0">
+            <a:pPr marL="0" indent="0">
               <a:buNone/>
             </a:pPr>
             <a:r>
@@ -2518,7 +2338,7 @@
           <a:bodyPr wrap="square" lIns="0" tIns="0" rIns="0" bIns="0" rtlCol="0" anchor="ctr"/>
           <a:lstStyle/>
           <a:p>
-            <a:pPr indent="0" marL="0">
+            <a:pPr marL="0" indent="0">
               <a:lnSpc>
                 <a:spcPct val="125000"/>
               </a:lnSpc>
@@ -2565,63 +2385,11 @@
             <a:prstDash val="solid"/>
           </a:ln>
         </p:spPr>
-      </p:sp>
-      <p:sp>
-        <p:nvSpPr>
-          <p:cNvPr id="9" name="Shape 7"/>
-          <p:cNvSpPr/>
-          <p:nvPr/>
-        </p:nvSpPr>
-        <p:spPr>
-          <a:xfrm>
-            <a:off x="685800" y="2606040"/>
-            <a:ext cx="402336" cy="402336"/>
-          </a:xfrm>
-          <a:prstGeom prst="ellipse">
-            <a:avLst/>
-          </a:prstGeom>
-          <a:solidFill>
-            <a:srgbClr val="6849F6"/>
-          </a:solidFill>
-          <a:ln/>
-        </p:spPr>
-      </p:sp>
-      <p:sp>
-        <p:nvSpPr>
-          <p:cNvPr id="10" name="Text 8"/>
-          <p:cNvSpPr txBox="1"/>
-          <p:nvPr/>
-        </p:nvSpPr>
-        <p:spPr>
-          <a:xfrm>
-            <a:off x="685800" y="2606040"/>
-            <a:ext cx="402336" cy="402336"/>
-          </a:xfrm>
-          <a:prstGeom prst="rect">
-            <a:avLst/>
-          </a:prstGeom>
-          <a:noFill/>
-          <a:ln/>
-        </p:spPr>
-        <p:txBody>
-          <a:bodyPr wrap="square" lIns="0" tIns="0" rIns="0" bIns="0" rtlCol="0" anchor="ctr"/>
-          <a:lstStyle/>
-          <a:p>
-            <a:pPr algn="ctr" indent="0" marL="0">
-              <a:buNone/>
-            </a:pPr>
-            <a:r>
-              <a:rPr lang="en-US" sz="1600" b="1" dirty="0">
-                <a:solidFill>
-                  <a:srgbClr val="FFFFFF"/>
-                </a:solidFill>
-                <a:latin typeface="Helvetica" pitchFamily="34" charset="0"/>
-                <a:ea typeface="Helvetica" pitchFamily="34" charset="-122"/>
-                <a:cs typeface="Helvetica" pitchFamily="34" charset="-120"/>
-              </a:rPr>
-              <a:t>B</a:t>
-            </a:r>
-            <a:endParaRPr lang="en-US" sz="1600" dirty="0"/>
+        <p:txBody>
+          <a:bodyPr/>
+          <a:lstStyle/>
+          <a:p>
+            <a:endParaRPr lang="en-ID"/>
           </a:p>
         </p:txBody>
       </p:sp>
@@ -2633,7 +2401,7 @@
         </p:nvSpPr>
         <p:spPr>
           <a:xfrm>
-            <a:off x="1225296" y="2606040"/>
+            <a:off x="683034" y="2606040"/>
             <a:ext cx="4590288" cy="402336"/>
           </a:xfrm>
           <a:prstGeom prst="rect">
@@ -2646,7 +2414,7 @@
           <a:bodyPr wrap="square" lIns="0" tIns="0" rIns="0" bIns="0" rtlCol="0" anchor="ctr"/>
           <a:lstStyle/>
           <a:p>
-            <a:pPr algn="l" indent="0" marL="0">
+            <a:pPr marL="0" indent="0" algn="l">
               <a:buNone/>
             </a:pPr>
             <a:r>
@@ -2685,7 +2453,7 @@
           <a:bodyPr wrap="square" lIns="0" tIns="0" rIns="0" bIns="0" rtlCol="0" anchor="ctr"/>
           <a:lstStyle/>
           <a:p>
-            <a:pPr indent="0" marL="0">
+            <a:pPr marL="0" indent="0">
               <a:lnSpc>
                 <a:spcPct val="120000"/>
               </a:lnSpc>
@@ -2732,63 +2500,11 @@
             <a:prstDash val="solid"/>
           </a:ln>
         </p:spPr>
-      </p:sp>
-      <p:sp>
-        <p:nvSpPr>
-          <p:cNvPr id="14" name="Shape 12"/>
-          <p:cNvSpPr/>
-          <p:nvPr/>
-        </p:nvSpPr>
-        <p:spPr>
-          <a:xfrm>
-            <a:off x="6391656" y="2606040"/>
-            <a:ext cx="402336" cy="402336"/>
-          </a:xfrm>
-          <a:prstGeom prst="ellipse">
-            <a:avLst/>
-          </a:prstGeom>
-          <a:solidFill>
-            <a:srgbClr val="6849F6"/>
-          </a:solidFill>
-          <a:ln/>
-        </p:spPr>
-      </p:sp>
-      <p:sp>
-        <p:nvSpPr>
-          <p:cNvPr id="15" name="Text 13"/>
-          <p:cNvSpPr txBox="1"/>
-          <p:nvPr/>
-        </p:nvSpPr>
-        <p:spPr>
-          <a:xfrm>
-            <a:off x="6391656" y="2606040"/>
-            <a:ext cx="402336" cy="402336"/>
-          </a:xfrm>
-          <a:prstGeom prst="rect">
-            <a:avLst/>
-          </a:prstGeom>
-          <a:noFill/>
-          <a:ln/>
-        </p:spPr>
-        <p:txBody>
-          <a:bodyPr wrap="square" lIns="0" tIns="0" rIns="0" bIns="0" rtlCol="0" anchor="ctr"/>
-          <a:lstStyle/>
-          <a:p>
-            <a:pPr algn="ctr" indent="0" marL="0">
-              <a:buNone/>
-            </a:pPr>
-            <a:r>
-              <a:rPr lang="en-US" sz="1600" b="1" dirty="0">
-                <a:solidFill>
-                  <a:srgbClr val="FFFFFF"/>
-                </a:solidFill>
-                <a:latin typeface="Helvetica" pitchFamily="34" charset="0"/>
-                <a:ea typeface="Helvetica" pitchFamily="34" charset="-122"/>
-                <a:cs typeface="Helvetica" pitchFamily="34" charset="-120"/>
-              </a:rPr>
-              <a:t>D</a:t>
-            </a:r>
-            <a:endParaRPr lang="en-US" sz="1600" dirty="0"/>
+        <p:txBody>
+          <a:bodyPr/>
+          <a:lstStyle/>
+          <a:p>
+            <a:endParaRPr lang="en-ID"/>
           </a:p>
         </p:txBody>
       </p:sp>
@@ -2800,7 +2516,7 @@
         </p:nvSpPr>
         <p:spPr>
           <a:xfrm>
-            <a:off x="6931152" y="2606040"/>
+            <a:off x="6388890" y="2606040"/>
             <a:ext cx="4590288" cy="402336"/>
           </a:xfrm>
           <a:prstGeom prst="rect">
@@ -2813,7 +2529,7 @@
           <a:bodyPr wrap="square" lIns="0" tIns="0" rIns="0" bIns="0" rtlCol="0" anchor="ctr"/>
           <a:lstStyle/>
           <a:p>
-            <a:pPr algn="l" indent="0" marL="0">
+            <a:pPr marL="0" indent="0" algn="l">
               <a:buNone/>
             </a:pPr>
             <a:r>
@@ -2852,7 +2568,7 @@
           <a:bodyPr wrap="square" lIns="0" tIns="0" rIns="0" bIns="0" rtlCol="0" anchor="ctr"/>
           <a:lstStyle/>
           <a:p>
-            <a:pPr indent="0" marL="0">
+            <a:pPr marL="0" indent="0">
               <a:lnSpc>
                 <a:spcPct val="120000"/>
               </a:lnSpc>
@@ -2899,63 +2615,11 @@
             <a:prstDash val="solid"/>
           </a:ln>
         </p:spPr>
-      </p:sp>
-      <p:sp>
-        <p:nvSpPr>
-          <p:cNvPr id="19" name="Shape 17"/>
-          <p:cNvSpPr/>
-          <p:nvPr/>
-        </p:nvSpPr>
-        <p:spPr>
-          <a:xfrm>
-            <a:off x="685800" y="4029456"/>
-            <a:ext cx="402336" cy="402336"/>
-          </a:xfrm>
-          <a:prstGeom prst="ellipse">
-            <a:avLst/>
-          </a:prstGeom>
-          <a:solidFill>
-            <a:srgbClr val="6849F6"/>
-          </a:solidFill>
-          <a:ln/>
-        </p:spPr>
-      </p:sp>
-      <p:sp>
-        <p:nvSpPr>
-          <p:cNvPr id="20" name="Text 18"/>
-          <p:cNvSpPr txBox="1"/>
-          <p:nvPr/>
-        </p:nvSpPr>
-        <p:spPr>
-          <a:xfrm>
-            <a:off x="685800" y="4029456"/>
-            <a:ext cx="402336" cy="402336"/>
-          </a:xfrm>
-          <a:prstGeom prst="rect">
-            <a:avLst/>
-          </a:prstGeom>
-          <a:noFill/>
-          <a:ln/>
-        </p:spPr>
-        <p:txBody>
-          <a:bodyPr wrap="square" lIns="0" tIns="0" rIns="0" bIns="0" rtlCol="0" anchor="ctr"/>
-          <a:lstStyle/>
-          <a:p>
-            <a:pPr algn="ctr" indent="0" marL="0">
-              <a:buNone/>
-            </a:pPr>
-            <a:r>
-              <a:rPr lang="en-US" sz="1600" b="1" dirty="0">
-                <a:solidFill>
-                  <a:srgbClr val="FFFFFF"/>
-                </a:solidFill>
-                <a:latin typeface="Helvetica" pitchFamily="34" charset="0"/>
-                <a:ea typeface="Helvetica" pitchFamily="34" charset="-122"/>
-                <a:cs typeface="Helvetica" pitchFamily="34" charset="-120"/>
-              </a:rPr>
-              <a:t>K</a:t>
-            </a:r>
-            <a:endParaRPr lang="en-US" sz="1600" dirty="0"/>
+        <p:txBody>
+          <a:bodyPr/>
+          <a:lstStyle/>
+          <a:p>
+            <a:endParaRPr lang="en-ID"/>
           </a:p>
         </p:txBody>
       </p:sp>
@@ -2967,7 +2631,7 @@
         </p:nvSpPr>
         <p:spPr>
           <a:xfrm>
-            <a:off x="1225296" y="4029456"/>
+            <a:off x="683034" y="4029456"/>
             <a:ext cx="4590288" cy="402336"/>
           </a:xfrm>
           <a:prstGeom prst="rect">
@@ -2980,7 +2644,7 @@
           <a:bodyPr wrap="square" lIns="0" tIns="0" rIns="0" bIns="0" rtlCol="0" anchor="ctr"/>
           <a:lstStyle/>
           <a:p>
-            <a:pPr algn="l" indent="0" marL="0">
+            <a:pPr marL="0" indent="0" algn="l">
               <a:buNone/>
             </a:pPr>
             <a:r>
@@ -3019,7 +2683,7 @@
           <a:bodyPr wrap="square" lIns="0" tIns="0" rIns="0" bIns="0" rtlCol="0" anchor="ctr"/>
           <a:lstStyle/>
           <a:p>
-            <a:pPr indent="0" marL="0">
+            <a:pPr marL="0" indent="0">
               <a:lnSpc>
                 <a:spcPct val="120000"/>
               </a:lnSpc>
@@ -3066,63 +2730,11 @@
             <a:prstDash val="solid"/>
           </a:ln>
         </p:spPr>
-      </p:sp>
-      <p:sp>
-        <p:nvSpPr>
-          <p:cNvPr id="24" name="Shape 22"/>
-          <p:cNvSpPr/>
-          <p:nvPr/>
-        </p:nvSpPr>
-        <p:spPr>
-          <a:xfrm>
-            <a:off x="6391656" y="4029456"/>
-            <a:ext cx="402336" cy="402336"/>
-          </a:xfrm>
-          <a:prstGeom prst="ellipse">
-            <a:avLst/>
-          </a:prstGeom>
-          <a:solidFill>
-            <a:srgbClr val="6849F6"/>
-          </a:solidFill>
-          <a:ln/>
-        </p:spPr>
-      </p:sp>
-      <p:sp>
-        <p:nvSpPr>
-          <p:cNvPr id="25" name="Text 23"/>
-          <p:cNvSpPr txBox="1"/>
-          <p:nvPr/>
-        </p:nvSpPr>
-        <p:spPr>
-          <a:xfrm>
-            <a:off x="6391656" y="4029456"/>
-            <a:ext cx="402336" cy="402336"/>
-          </a:xfrm>
-          <a:prstGeom prst="rect">
-            <a:avLst/>
-          </a:prstGeom>
-          <a:noFill/>
-          <a:ln/>
-        </p:spPr>
-        <p:txBody>
-          <a:bodyPr wrap="square" lIns="0" tIns="0" rIns="0" bIns="0" rtlCol="0" anchor="ctr"/>
-          <a:lstStyle/>
-          <a:p>
-            <a:pPr algn="ctr" indent="0" marL="0">
-              <a:buNone/>
-            </a:pPr>
-            <a:r>
-              <a:rPr lang="en-US" sz="1600" b="1" dirty="0">
-                <a:solidFill>
-                  <a:srgbClr val="FFFFFF"/>
-                </a:solidFill>
-                <a:latin typeface="Helvetica" pitchFamily="34" charset="0"/>
-                <a:ea typeface="Helvetica" pitchFamily="34" charset="-122"/>
-                <a:cs typeface="Helvetica" pitchFamily="34" charset="-120"/>
-              </a:rPr>
-              <a:t>T</a:t>
-            </a:r>
-            <a:endParaRPr lang="en-US" sz="1600" dirty="0"/>
+        <p:txBody>
+          <a:bodyPr/>
+          <a:lstStyle/>
+          <a:p>
+            <a:endParaRPr lang="en-ID"/>
           </a:p>
         </p:txBody>
       </p:sp>
@@ -3134,7 +2746,7 @@
         </p:nvSpPr>
         <p:spPr>
           <a:xfrm>
-            <a:off x="6931152" y="4029456"/>
+            <a:off x="6388890" y="4029456"/>
             <a:ext cx="4590288" cy="402336"/>
           </a:xfrm>
           <a:prstGeom prst="rect">
@@ -3147,7 +2759,7 @@
           <a:bodyPr wrap="square" lIns="0" tIns="0" rIns="0" bIns="0" rtlCol="0" anchor="ctr"/>
           <a:lstStyle/>
           <a:p>
-            <a:pPr algn="l" indent="0" marL="0">
+            <a:pPr marL="0" indent="0" algn="l">
               <a:buNone/>
             </a:pPr>
             <a:r>
@@ -3186,7 +2798,7 @@
           <a:bodyPr wrap="square" lIns="0" tIns="0" rIns="0" bIns="0" rtlCol="0" anchor="ctr"/>
           <a:lstStyle/>
           <a:p>
-            <a:pPr indent="0" marL="0">
+            <a:pPr marL="0" indent="0">
               <a:lnSpc>
                 <a:spcPct val="120000"/>
               </a:lnSpc>
@@ -3233,6 +2845,13 @@
             <a:prstDash val="solid"/>
           </a:ln>
         </p:spPr>
+        <p:txBody>
+          <a:bodyPr/>
+          <a:lstStyle/>
+          <a:p>
+            <a:endParaRPr lang="en-ID"/>
+          </a:p>
+        </p:txBody>
       </p:sp>
       <p:sp>
         <p:nvSpPr>
@@ -3255,11 +2874,11 @@
           <a:bodyPr wrap="square" lIns="0" tIns="0" rIns="0" bIns="0" rtlCol="0" anchor="ctr"/>
           <a:lstStyle/>
           <a:p>
-            <a:pPr indent="0" marL="0">
-              <a:buNone/>
-            </a:pPr>
-            <a:r>
-              <a:rPr lang="en-US" sz="1150" b="1" spc="30" kern="0" dirty="0">
+            <a:pPr marL="0" indent="0">
+              <a:buNone/>
+            </a:pPr>
+            <a:r>
+              <a:rPr lang="en-US" sz="1150" b="1" kern="0" spc="30" dirty="0">
                 <a:solidFill>
                   <a:srgbClr val="4B36C7"/>
                 </a:solidFill>
@@ -3294,7 +2913,7 @@
           <a:bodyPr wrap="square" lIns="0" tIns="0" rIns="0" bIns="0" rtlCol="0" anchor="ctr"/>
           <a:lstStyle/>
           <a:p>
-            <a:pPr indent="0" marL="0">
+            <a:pPr marL="0" indent="0">
               <a:lnSpc>
                 <a:spcPct val="125000"/>
               </a:lnSpc>
@@ -3331,6 +2950,7 @@
         <a:solidFill>
           <a:srgbClr val="FFFFFF"/>
         </a:solidFill>
+        <a:effectLst/>
       </p:bgPr>
     </p:bg>
     <p:spTree>
@@ -3366,6 +2986,13 @@
           </a:solidFill>
           <a:ln/>
         </p:spPr>
+        <p:txBody>
+          <a:bodyPr/>
+          <a:lstStyle/>
+          <a:p>
+            <a:endParaRPr lang="en-ID"/>
+          </a:p>
+        </p:txBody>
       </p:sp>
       <p:sp>
         <p:nvSpPr>
@@ -3386,6 +3013,13 @@
           </a:solidFill>
           <a:ln/>
         </p:spPr>
+        <p:txBody>
+          <a:bodyPr/>
+          <a:lstStyle/>
+          <a:p>
+            <a:endParaRPr lang="en-ID"/>
+          </a:p>
+        </p:txBody>
       </p:sp>
       <p:sp>
         <p:nvSpPr>
@@ -3408,7 +3042,7 @@
           <a:bodyPr wrap="square" lIns="0" tIns="0" rIns="0" bIns="0" rtlCol="0" anchor="ctr"/>
           <a:lstStyle/>
           <a:p>
-            <a:pPr indent="0" marL="0">
+            <a:pPr marL="0" indent="0">
               <a:buNone/>
             </a:pPr>
             <a:r>
@@ -3422,9 +3056,6 @@
               </a:rPr>
               <a:t>belajar</a:t>
             </a:r>
-            <a:pPr indent="0" marL="0">
-              <a:buNone/>
-            </a:pPr>
             <a:r>
               <a:rPr lang="en-US" sz="2000" b="1" dirty="0">
                 <a:solidFill>
@@ -3461,7 +3092,7 @@
           <a:bodyPr wrap="square" lIns="0" tIns="0" rIns="0" bIns="0" rtlCol="0" anchor="ctr"/>
           <a:lstStyle/>
           <a:p>
-            <a:pPr algn="r" indent="0" marL="0">
+            <a:pPr marL="0" indent="0" algn="r">
               <a:buNone/>
             </a:pPr>
             <a:r>
@@ -3500,7 +3131,7 @@
           <a:bodyPr wrap="square" lIns="0" tIns="0" rIns="0" bIns="0" rtlCol="0" anchor="ctr"/>
           <a:lstStyle/>
           <a:p>
-            <a:pPr indent="0" marL="0">
+            <a:pPr marL="0" indent="0">
               <a:buNone/>
             </a:pPr>
             <a:r>
@@ -3539,11 +3170,11 @@
           <a:bodyPr wrap="square" lIns="0" tIns="0" rIns="0" bIns="0" rtlCol="0" anchor="ctr"/>
           <a:lstStyle/>
           <a:p>
-            <a:pPr indent="0" marL="0">
-              <a:buNone/>
-            </a:pPr>
-            <a:r>
-              <a:rPr lang="en-US" sz="1250" b="1" spc="40" kern="0" dirty="0">
+            <a:pPr marL="0" indent="0">
+              <a:buNone/>
+            </a:pPr>
+            <a:r>
+              <a:rPr lang="en-US" sz="1250" b="1" kern="0" spc="40" dirty="0">
                 <a:solidFill>
                   <a:srgbClr val="4B36C7"/>
                 </a:solidFill>
@@ -3578,7 +3209,7 @@
           <a:bodyPr wrap="square" lIns="0" tIns="0" rIns="0" bIns="0" rtlCol="0" anchor="ctr"/>
           <a:lstStyle/>
           <a:p>
-            <a:pPr indent="0" marL="0">
+            <a:pPr marL="0" indent="0">
               <a:lnSpc>
                 <a:spcPct val="125000"/>
               </a:lnSpc>
@@ -3620,11 +3251,11 @@
           <a:bodyPr wrap="square" lIns="0" tIns="0" rIns="0" bIns="0" rtlCol="0" anchor="ctr"/>
           <a:lstStyle/>
           <a:p>
-            <a:pPr indent="0" marL="0">
-              <a:buNone/>
-            </a:pPr>
-            <a:r>
-              <a:rPr lang="en-US" sz="1250" b="1" spc="40" kern="0" dirty="0">
+            <a:pPr marL="0" indent="0">
+              <a:buNone/>
+            </a:pPr>
+            <a:r>
+              <a:rPr lang="en-US" sz="1250" b="1" kern="0" spc="40" dirty="0">
                 <a:solidFill>
                   <a:srgbClr val="4B36C7"/>
                 </a:solidFill>
@@ -3659,7 +3290,7 @@
           <a:bodyPr wrap="square" lIns="0" tIns="0" rIns="0" bIns="0" rtlCol="0" anchor="ctr"/>
           <a:lstStyle/>
           <a:p>
-            <a:pPr indent="0" marL="0">
+            <a:pPr marL="0" indent="0">
               <a:lnSpc>
                 <a:spcPct val="125000"/>
               </a:lnSpc>
@@ -3706,6 +3337,13 @@
             <a:prstDash val="solid"/>
           </a:ln>
         </p:spPr>
+        <p:txBody>
+          <a:bodyPr/>
+          <a:lstStyle/>
+          <a:p>
+            <a:endParaRPr lang="en-ID"/>
+          </a:p>
+        </p:txBody>
       </p:sp>
       <p:sp>
         <p:nvSpPr>
@@ -3728,11 +3366,11 @@
           <a:bodyPr wrap="square" lIns="0" tIns="0" rIns="0" bIns="0" rtlCol="0" anchor="ctr"/>
           <a:lstStyle/>
           <a:p>
-            <a:pPr indent="0" marL="0">
-              <a:buNone/>
-            </a:pPr>
-            <a:r>
-              <a:rPr lang="en-US" sz="1150" b="1" spc="30" kern="0" dirty="0">
+            <a:pPr marL="0" indent="0">
+              <a:buNone/>
+            </a:pPr>
+            <a:r>
+              <a:rPr lang="en-US" sz="1150" b="1" kern="0" spc="30" dirty="0">
                 <a:solidFill>
                   <a:srgbClr val="4B36C7"/>
                 </a:solidFill>
@@ -3767,7 +3405,7 @@
           <a:bodyPr wrap="square" lIns="0" tIns="0" rIns="0" bIns="0" rtlCol="0" anchor="ctr"/>
           <a:lstStyle/>
           <a:p>
-            <a:pPr indent="0" marL="0">
+            <a:pPr marL="0" indent="0">
               <a:lnSpc>
                 <a:spcPct val="125000"/>
               </a:lnSpc>
@@ -3804,6 +3442,7 @@
         <a:solidFill>
           <a:srgbClr val="FFFFFF"/>
         </a:solidFill>
+        <a:effectLst/>
       </p:bgPr>
     </p:bg>
     <p:spTree>
@@ -3839,6 +3478,13 @@
           </a:solidFill>
           <a:ln/>
         </p:spPr>
+        <p:txBody>
+          <a:bodyPr/>
+          <a:lstStyle/>
+          <a:p>
+            <a:endParaRPr lang="en-ID"/>
+          </a:p>
+        </p:txBody>
       </p:sp>
       <p:sp>
         <p:nvSpPr>
@@ -3859,6 +3505,13 @@
           </a:solidFill>
           <a:ln/>
         </p:spPr>
+        <p:txBody>
+          <a:bodyPr/>
+          <a:lstStyle/>
+          <a:p>
+            <a:endParaRPr lang="en-ID"/>
+          </a:p>
+        </p:txBody>
       </p:sp>
       <p:sp>
         <p:nvSpPr>
@@ -3881,7 +3534,7 @@
           <a:bodyPr wrap="square" lIns="0" tIns="0" rIns="0" bIns="0" rtlCol="0" anchor="ctr"/>
           <a:lstStyle/>
           <a:p>
-            <a:pPr indent="0" marL="0">
+            <a:pPr marL="0" indent="0">
               <a:buNone/>
             </a:pPr>
             <a:r>
@@ -3895,9 +3548,6 @@
               </a:rPr>
               <a:t>belajar</a:t>
             </a:r>
-            <a:pPr indent="0" marL="0">
-              <a:buNone/>
-            </a:pPr>
             <a:r>
               <a:rPr lang="en-US" sz="2000" b="1" dirty="0">
                 <a:solidFill>
@@ -3934,7 +3584,7 @@
           <a:bodyPr wrap="square" lIns="0" tIns="0" rIns="0" bIns="0" rtlCol="0" anchor="ctr"/>
           <a:lstStyle/>
           <a:p>
-            <a:pPr algn="r" indent="0" marL="0">
+            <a:pPr marL="0" indent="0" algn="r">
               <a:buNone/>
             </a:pPr>
             <a:r>
@@ -3973,7 +3623,7 @@
           <a:bodyPr wrap="square" lIns="0" tIns="0" rIns="0" bIns="0" rtlCol="0" anchor="ctr"/>
           <a:lstStyle/>
           <a:p>
-            <a:pPr indent="0" marL="0">
+            <a:pPr marL="0" indent="0">
               <a:buNone/>
             </a:pPr>
             <a:r>
@@ -4131,6 +3781,30 @@
             </a:r>
             <a:endParaRPr lang="en-US" sz="1300" dirty="0"/>
           </a:p>
+          <a:p>
+            <a:pPr marL="342900" indent="-342900">
+              <a:lnSpc>
+                <a:spcPct val="125000"/>
+              </a:lnSpc>
+              <a:spcAft>
+                <a:spcPts val="800"/>
+              </a:spcAft>
+              <a:buSzPct val="100000"/>
+              <a:buChar char="•"/>
+            </a:pPr>
+            <a:r>
+              <a:rPr lang="en-US" sz="1300" dirty="0">
+                <a:solidFill>
+                  <a:srgbClr val="23283A"/>
+                </a:solidFill>
+                <a:latin typeface="Helvetica" pitchFamily="34" charset="0"/>
+                <a:ea typeface="Helvetica" pitchFamily="34" charset="-122"/>
+                <a:cs typeface="Helvetica" pitchFamily="34" charset="-120"/>
+              </a:rPr>
+              <a:t>Buat satu Claude Project khusus untuk situsmu sebelum mulai Modul 2 — gratis, dan menjaga semua modul tetap nyambung</a:t>
+            </a:r>
+            <a:endParaRPr lang="en-US" sz="1300" dirty="0"/>
+          </a:p>
         </p:txBody>
       </p:sp>
       <p:sp>
@@ -4159,6 +3833,13 @@
             <a:prstDash val="solid"/>
           </a:ln>
         </p:spPr>
+        <p:txBody>
+          <a:bodyPr/>
+          <a:lstStyle/>
+          <a:p>
+            <a:endParaRPr lang="en-ID"/>
+          </a:p>
+        </p:txBody>
       </p:sp>
       <p:sp>
         <p:nvSpPr>
@@ -4181,11 +3862,11 @@
           <a:bodyPr wrap="square" lIns="0" tIns="0" rIns="0" bIns="0" rtlCol="0" anchor="ctr"/>
           <a:lstStyle/>
           <a:p>
-            <a:pPr indent="0" marL="0">
-              <a:buNone/>
-            </a:pPr>
-            <a:r>
-              <a:rPr lang="en-US" sz="1150" b="1" spc="30" kern="0" dirty="0">
+            <a:pPr marL="0" indent="0">
+              <a:buNone/>
+            </a:pPr>
+            <a:r>
+              <a:rPr lang="en-US" sz="1150" b="1" kern="0" spc="30" dirty="0">
                 <a:solidFill>
                   <a:srgbClr val="4B36C7"/>
                 </a:solidFill>
@@ -4220,7 +3901,7 @@
           <a:bodyPr wrap="square" lIns="0" tIns="0" rIns="0" bIns="0" rtlCol="0" anchor="ctr"/>
           <a:lstStyle/>
           <a:p>
-            <a:pPr indent="0" marL="0">
+            <a:pPr marL="0" indent="0">
               <a:lnSpc>
                 <a:spcPct val="125000"/>
               </a:lnSpc>
@@ -4257,6 +3938,7 @@
         <a:solidFill>
           <a:srgbClr val="FFFFFF"/>
         </a:solidFill>
+        <a:effectLst/>
       </p:bgPr>
     </p:bg>
     <p:spTree>
@@ -4292,6 +3974,13 @@
           </a:solidFill>
           <a:ln/>
         </p:spPr>
+        <p:txBody>
+          <a:bodyPr/>
+          <a:lstStyle/>
+          <a:p>
+            <a:endParaRPr lang="en-ID"/>
+          </a:p>
+        </p:txBody>
       </p:sp>
       <p:sp>
         <p:nvSpPr>
@@ -4312,6 +4001,13 @@
           </a:solidFill>
           <a:ln/>
         </p:spPr>
+        <p:txBody>
+          <a:bodyPr/>
+          <a:lstStyle/>
+          <a:p>
+            <a:endParaRPr lang="en-ID"/>
+          </a:p>
+        </p:txBody>
       </p:sp>
       <p:sp>
         <p:nvSpPr>
@@ -4334,7 +4030,7 @@
           <a:bodyPr wrap="square" lIns="0" tIns="0" rIns="0" bIns="0" rtlCol="0" anchor="ctr"/>
           <a:lstStyle/>
           <a:p>
-            <a:pPr indent="0" marL="0">
+            <a:pPr marL="0" indent="0">
               <a:buNone/>
             </a:pPr>
             <a:r>
@@ -4348,9 +4044,6 @@
               </a:rPr>
               <a:t>belajar</a:t>
             </a:r>
-            <a:pPr indent="0" marL="0">
-              <a:buNone/>
-            </a:pPr>
             <a:r>
               <a:rPr lang="en-US" sz="2000" b="1" dirty="0">
                 <a:solidFill>
@@ -4387,7 +4080,7 @@
           <a:bodyPr wrap="square" lIns="0" tIns="0" rIns="0" bIns="0" rtlCol="0" anchor="ctr"/>
           <a:lstStyle/>
           <a:p>
-            <a:pPr algn="r" indent="0" marL="0">
+            <a:pPr marL="0" indent="0" algn="r">
               <a:buNone/>
             </a:pPr>
             <a:r>
@@ -4426,7 +4119,7 @@
           <a:bodyPr wrap="square" lIns="0" tIns="0" rIns="0" bIns="0" rtlCol="0" anchor="ctr"/>
           <a:lstStyle/>
           <a:p>
-            <a:pPr indent="0" marL="0">
+            <a:pPr marL="0" indent="0">
               <a:buNone/>
             </a:pPr>
             <a:r>
@@ -4465,11 +4158,11 @@
           <a:bodyPr wrap="square" lIns="0" tIns="0" rIns="0" bIns="0" rtlCol="0" anchor="ctr"/>
           <a:lstStyle/>
           <a:p>
-            <a:pPr indent="0" marL="0">
-              <a:buNone/>
-            </a:pPr>
-            <a:r>
-              <a:rPr lang="en-US" sz="1250" b="1" spc="40" kern="0" dirty="0">
+            <a:pPr marL="0" indent="0">
+              <a:buNone/>
+            </a:pPr>
+            <a:r>
+              <a:rPr lang="en-US" sz="1250" b="1" kern="0" spc="40" dirty="0">
                 <a:solidFill>
                   <a:srgbClr val="4B36C7"/>
                 </a:solidFill>
@@ -4504,6 +4197,13 @@
           </a:solidFill>
           <a:ln/>
         </p:spPr>
+        <p:txBody>
+          <a:bodyPr/>
+          <a:lstStyle/>
+          <a:p>
+            <a:endParaRPr lang="en-ID"/>
+          </a:p>
+        </p:txBody>
       </p:sp>
       <p:sp>
         <p:nvSpPr>
@@ -4526,7 +4226,7 @@
           <a:bodyPr wrap="square" lIns="0" tIns="0" rIns="0" bIns="0" rtlCol="0" anchor="ctr"/>
           <a:lstStyle/>
           <a:p>
-            <a:pPr indent="0" marL="0">
+            <a:pPr marL="0" indent="0">
               <a:lnSpc>
                 <a:spcPct val="130000"/>
               </a:lnSpc>
@@ -4573,6 +4273,13 @@
             <a:prstDash val="solid"/>
           </a:ln>
         </p:spPr>
+        <p:txBody>
+          <a:bodyPr/>
+          <a:lstStyle/>
+          <a:p>
+            <a:endParaRPr lang="en-ID"/>
+          </a:p>
+        </p:txBody>
       </p:sp>
       <p:sp>
         <p:nvSpPr>
@@ -4595,11 +4302,11 @@
           <a:bodyPr wrap="square" lIns="0" tIns="0" rIns="0" bIns="0" rtlCol="0" anchor="ctr"/>
           <a:lstStyle/>
           <a:p>
-            <a:pPr indent="0" marL="0">
-              <a:buNone/>
-            </a:pPr>
-            <a:r>
-              <a:rPr lang="en-US" sz="1250" b="1" spc="30" kern="0" dirty="0">
+            <a:pPr marL="0" indent="0">
+              <a:buNone/>
+            </a:pPr>
+            <a:r>
+              <a:rPr lang="en-US" sz="1250" b="1" kern="0" spc="30" dirty="0">
                 <a:solidFill>
                   <a:srgbClr val="1A7A44"/>
                 </a:solidFill>
@@ -4634,7 +4341,7 @@
           <a:bodyPr wrap="square" lIns="0" tIns="0" rIns="0" bIns="0" rtlCol="0" anchor="ctr"/>
           <a:lstStyle/>
           <a:p>
-            <a:pPr indent="0" marL="0">
+            <a:pPr marL="0" indent="0">
               <a:lnSpc>
                 <a:spcPct val="128000"/>
               </a:lnSpc>
@@ -4681,6 +4388,13 @@
             <a:prstDash val="solid"/>
           </a:ln>
         </p:spPr>
+        <p:txBody>
+          <a:bodyPr/>
+          <a:lstStyle/>
+          <a:p>
+            <a:endParaRPr lang="en-ID"/>
+          </a:p>
+        </p:txBody>
       </p:sp>
       <p:sp>
         <p:nvSpPr>
@@ -4701,6 +4415,13 @@
           </a:solidFill>
           <a:ln/>
         </p:spPr>
+        <p:txBody>
+          <a:bodyPr/>
+          <a:lstStyle/>
+          <a:p>
+            <a:endParaRPr lang="en-ID"/>
+          </a:p>
+        </p:txBody>
       </p:sp>
       <p:sp>
         <p:nvSpPr>
@@ -4723,7 +4444,7 @@
           <a:bodyPr wrap="square" lIns="0" tIns="0" rIns="0" bIns="0" rtlCol="0" anchor="ctr"/>
           <a:lstStyle/>
           <a:p>
-            <a:pPr algn="ctr" indent="0" marL="0">
+            <a:pPr marL="0" indent="0" algn="ctr">
               <a:buNone/>
             </a:pPr>
             <a:r>
@@ -4762,7 +4483,7 @@
           <a:bodyPr wrap="square" lIns="0" tIns="0" rIns="0" bIns="0" rtlCol="0" anchor="ctr"/>
           <a:lstStyle/>
           <a:p>
-            <a:pPr indent="0" marL="0">
+            <a:pPr marL="0" indent="0">
               <a:buNone/>
             </a:pPr>
             <a:r>
@@ -4801,7 +4522,7 @@
           <a:bodyPr wrap="square" lIns="0" tIns="0" rIns="0" bIns="0" rtlCol="0" anchor="ctr"/>
           <a:lstStyle/>
           <a:p>
-            <a:pPr indent="0" marL="0">
+            <a:pPr marL="0" indent="0">
               <a:lnSpc>
                 <a:spcPct val="125000"/>
               </a:lnSpc>
@@ -4817,6 +4538,363 @@
                 <a:cs typeface="Helvetica" pitchFamily="34" charset="-120"/>
               </a:rPr>
               <a:t>Satu brief singkat: jenis situs yang mau kamu bangun, target pengunjung, dan draft daftar halaman yang dibutuhkan. Ini jadi fondasi buat Modul 2.</a:t>
+            </a:r>
+            <a:endParaRPr lang="en-US" sz="1150" dirty="0"/>
+          </a:p>
+        </p:txBody>
+      </p:sp>
+    </p:spTree>
+  </p:cSld>
+  <p:clrMapOvr>
+    <a:masterClrMapping/>
+  </p:clrMapOvr>
+</p:sld>
+</file>
+
+<file path=ppt/slides/slide7.xml><?xml version="1.0" encoding="utf-8"?>
+<p:sld xmlns:a="http://schemas.openxmlformats.org/drawingml/2006/main" xmlns:p="http://schemas.openxmlformats.org/presentationml/2006/main" xmlns:r="http://schemas.openxmlformats.org/officeDocument/2006/relationships">
+  <p:cSld>
+    <p:spTree>
+      <p:nvGrpSpPr>
+        <p:cNvPr id="1" name=""/>
+        <p:cNvGrpSpPr/>
+        <p:nvPr/>
+      </p:nvGrpSpPr>
+      <p:grpSpPr/>
+      <p:sp>
+        <p:nvSpPr>
+          <p:cNvPr id="2" name="Shape 0"/>
+          <p:cNvSpPr/>
+          <p:nvPr/>
+        </p:nvSpPr>
+        <p:spPr>
+          <a:xfrm>
+            <a:off x="0" y="0"/>
+            <a:ext cx="12191695" cy="960120"/>
+          </a:xfrm>
+          <a:prstGeom prst="rect">
+            <a:avLst/>
+          </a:prstGeom>
+          <a:solidFill>
+            <a:srgbClr val="0D1321"/>
+          </a:solidFill>
+          <a:ln/>
+        </p:spPr>
+        <p:txBody>
+          <a:bodyPr/>
+          <a:lstStyle/>
+          <a:p>
+            <a:endParaRPr lang="en-ID"/>
+          </a:p>
+        </p:txBody>
+      </p:sp>
+      <p:sp>
+        <p:nvSpPr>
+          <p:cNvPr id="3" name="Shape 1"/>
+          <p:cNvSpPr/>
+          <p:nvPr/>
+        </p:nvSpPr>
+        <p:spPr>
+          <a:xfrm>
+            <a:off x="0" y="960120"/>
+            <a:ext cx="12191695" cy="41148"/>
+          </a:xfrm>
+          <a:prstGeom prst="rect">
+            <a:avLst/>
+          </a:prstGeom>
+          <a:solidFill>
+            <a:srgbClr val="6849F6"/>
+          </a:solidFill>
+          <a:ln/>
+        </p:spPr>
+        <p:txBody>
+          <a:bodyPr/>
+          <a:lstStyle/>
+          <a:p>
+            <a:endParaRPr lang="en-ID"/>
+          </a:p>
+        </p:txBody>
+      </p:sp>
+      <p:sp>
+        <p:nvSpPr>
+          <p:cNvPr id="4" name="Text 2"/>
+          <p:cNvSpPr txBox="1"/>
+          <p:nvPr/>
+        </p:nvSpPr>
+        <p:spPr>
+          <a:xfrm>
+            <a:off x="502920" y="256032"/>
+            <a:ext cx="3657600" cy="457200"/>
+          </a:xfrm>
+          <a:prstGeom prst="rect">
+            <a:avLst/>
+          </a:prstGeom>
+          <a:noFill/>
+          <a:ln/>
+        </p:spPr>
+        <p:txBody>
+          <a:bodyPr wrap="square" lIns="0" tIns="0" rIns="0" bIns="0" rtlCol="0" anchor="ctr"/>
+          <a:lstStyle/>
+          <a:p>
+            <a:pPr marL="0" indent="0">
+              <a:buNone/>
+            </a:pPr>
+            <a:r>
+              <a:rPr lang="en-US" sz="2000" b="1" dirty="0">
+                <a:solidFill>
+                  <a:srgbClr val="FFFFFF"/>
+                </a:solidFill>
+                <a:latin typeface="Helvetica" pitchFamily="34" charset="0"/>
+                <a:ea typeface="Helvetica" pitchFamily="34" charset="-122"/>
+                <a:cs typeface="Helvetica" pitchFamily="34" charset="-120"/>
+              </a:rPr>
+              <a:t>belajar</a:t>
+            </a:r>
+            <a:r>
+              <a:rPr lang="en-US" sz="2000" b="1" dirty="0">
+                <a:solidFill>
+                  <a:srgbClr val="8B7CF6"/>
+                </a:solidFill>
+                <a:latin typeface="Helvetica" pitchFamily="34" charset="0"/>
+                <a:ea typeface="Helvetica" pitchFamily="34" charset="-122"/>
+                <a:cs typeface="Helvetica" pitchFamily="34" charset="-120"/>
+              </a:rPr>
+              <a:t>claude</a:t>
+            </a:r>
+            <a:endParaRPr lang="en-US" sz="2000" dirty="0"/>
+          </a:p>
+        </p:txBody>
+      </p:sp>
+      <p:sp>
+        <p:nvSpPr>
+          <p:cNvPr id="5" name="Text 3"/>
+          <p:cNvSpPr txBox="1"/>
+          <p:nvPr/>
+        </p:nvSpPr>
+        <p:spPr>
+          <a:xfrm>
+            <a:off x="5029200" y="274320"/>
+            <a:ext cx="6675120" cy="411480"/>
+          </a:xfrm>
+          <a:prstGeom prst="rect">
+            <a:avLst/>
+          </a:prstGeom>
+          <a:noFill/>
+          <a:ln/>
+        </p:spPr>
+        <p:txBody>
+          <a:bodyPr wrap="square" lIns="0" tIns="0" rIns="0" bIns="0" rtlCol="0" anchor="ctr"/>
+          <a:lstStyle/>
+          <a:p>
+            <a:pPr marL="0" indent="0" algn="r">
+              <a:buNone/>
+            </a:pPr>
+            <a:r>
+              <a:rPr lang="en-US" sz="1250" dirty="0">
+                <a:solidFill>
+                  <a:srgbClr val="9AA2B4"/>
+                </a:solidFill>
+                <a:latin typeface="Helvetica" pitchFamily="34" charset="0"/>
+                <a:ea typeface="Helvetica" pitchFamily="34" charset="-122"/>
+                <a:cs typeface="Helvetica" pitchFamily="34" charset="-120"/>
+              </a:rPr>
+              <a:t>Modul 1 — Apa yang Akan Kita Bangun</a:t>
+            </a:r>
+            <a:endParaRPr lang="en-US" sz="1250" dirty="0"/>
+          </a:p>
+        </p:txBody>
+      </p:sp>
+      <p:sp>
+        <p:nvSpPr>
+          <p:cNvPr id="6" name="Text 4"/>
+          <p:cNvSpPr txBox="1"/>
+          <p:nvPr/>
+        </p:nvSpPr>
+        <p:spPr>
+          <a:xfrm>
+            <a:off x="502920" y="1234440"/>
+            <a:ext cx="11155680" cy="502920"/>
+          </a:xfrm>
+          <a:prstGeom prst="rect">
+            <a:avLst/>
+          </a:prstGeom>
+          <a:noFill/>
+          <a:ln/>
+        </p:spPr>
+        <p:txBody>
+          <a:bodyPr wrap="square" lIns="0" tIns="0" rIns="0" bIns="0" rtlCol="0" anchor="ctr"/>
+          <a:lstStyle/>
+          <a:p>
+            <a:pPr marL="0" indent="0">
+              <a:buNone/>
+            </a:pPr>
+            <a:r>
+              <a:rPr lang="en-US" sz="2200" b="1" dirty="0">
+                <a:solidFill>
+                  <a:srgbClr val="0D1321"/>
+                </a:solidFill>
+                <a:latin typeface="Helvetica" pitchFamily="34" charset="0"/>
+                <a:ea typeface="Helvetica" pitchFamily="34" charset="-122"/>
+                <a:cs typeface="Helvetica" pitchFamily="34" charset="-120"/>
+              </a:rPr>
+              <a:t>Siapkan Claude Project Sebelum Mulai</a:t>
+            </a:r>
+            <a:endParaRPr lang="en-US" sz="2200" dirty="0"/>
+          </a:p>
+        </p:txBody>
+      </p:sp>
+      <p:sp>
+        <p:nvSpPr>
+          <p:cNvPr id="8" name="Text 6"/>
+          <p:cNvSpPr txBox="1"/>
+          <p:nvPr/>
+        </p:nvSpPr>
+        <p:spPr>
+          <a:xfrm>
+            <a:off x="502920" y="1965960"/>
+            <a:ext cx="11155680" cy="642937"/>
+          </a:xfrm>
+          <a:prstGeom prst="rect">
+            <a:avLst/>
+          </a:prstGeom>
+          <a:noFill/>
+          <a:ln/>
+        </p:spPr>
+        <p:txBody>
+          <a:bodyPr wrap="square" lIns="0" tIns="0" rIns="0" bIns="0" rtlCol="0" anchor="ctr"/>
+          <a:lstStyle/>
+          <a:p>
+            <a:pPr marL="0" indent="0">
+              <a:lnSpc>
+                <a:spcPct val="125000"/>
+              </a:lnSpc>
+              <a:buNone/>
+            </a:pPr>
+            <a:r>
+              <a:rPr lang="en-US" sz="1350" dirty="0">
+                <a:solidFill>
+                  <a:srgbClr val="23283A"/>
+                </a:solidFill>
+                <a:latin typeface="Helvetica" pitchFamily="34" charset="0"/>
+                <a:ea typeface="Helvetica" pitchFamily="34" charset="-122"/>
+                <a:cs typeface="Helvetica" pitchFamily="34" charset="-120"/>
+              </a:rPr>
+              <a:t>Kursus ini berjalan lintas beberapa modul, dan tiap modul memakai hasil dari modul sebelumnya — sitemap dari Modul 2, kerangka desain dari Modul 3, dan seterusnya. Supaya semuanya nggak tercecer di chat yang berbeda-beda, buat satu Project di Claude khusus untuk situsmu (misalnya “Katalog Toko Roti”) sebelum mulai Modul 2.</a:t>
+            </a:r>
+            <a:endParaRPr lang="en-US" sz="1350" dirty="0"/>
+          </a:p>
+        </p:txBody>
+      </p:sp>
+      <p:sp>
+        <p:nvSpPr>
+          <p:cNvPr id="11" name="Shape 9"/>
+          <p:cNvSpPr/>
+          <p:nvPr/>
+        </p:nvSpPr>
+        <p:spPr>
+          <a:xfrm>
+            <a:off x="502920" y="2883217"/>
+            <a:ext cx="11183112" cy="1260919"/>
+          </a:xfrm>
+          <a:prstGeom prst="roundRect">
+            <a:avLst>
+              <a:gd name="adj" fmla="val 8480"/>
+            </a:avLst>
+          </a:prstGeom>
+          <a:solidFill>
+            <a:srgbClr val="F3F0FF"/>
+          </a:solidFill>
+          <a:ln w="12700">
+            <a:solidFill>
+              <a:srgbClr val="DCD3FB"/>
+            </a:solidFill>
+            <a:prstDash val="solid"/>
+          </a:ln>
+        </p:spPr>
+        <p:txBody>
+          <a:bodyPr/>
+          <a:lstStyle/>
+          <a:p>
+            <a:endParaRPr lang="en-ID"/>
+          </a:p>
+        </p:txBody>
+      </p:sp>
+      <p:sp>
+        <p:nvSpPr>
+          <p:cNvPr id="12" name="Text 10"/>
+          <p:cNvSpPr txBox="1"/>
+          <p:nvPr/>
+        </p:nvSpPr>
+        <p:spPr>
+          <a:xfrm>
+            <a:off x="704088" y="3047809"/>
+            <a:ext cx="10780776" cy="256032"/>
+          </a:xfrm>
+          <a:prstGeom prst="rect">
+            <a:avLst/>
+          </a:prstGeom>
+          <a:noFill/>
+          <a:ln/>
+        </p:spPr>
+        <p:txBody>
+          <a:bodyPr wrap="square" lIns="0" tIns="0" rIns="0" bIns="0" rtlCol="0" anchor="ctr"/>
+          <a:lstStyle/>
+          <a:p>
+            <a:pPr marL="0" indent="0">
+              <a:buNone/>
+            </a:pPr>
+            <a:r>
+              <a:rPr lang="en-US" sz="1150" b="1" kern="0" spc="30" dirty="0">
+                <a:solidFill>
+                  <a:srgbClr val="4B36C7"/>
+                </a:solidFill>
+                <a:latin typeface="Helvetica" pitchFamily="34" charset="0"/>
+                <a:ea typeface="Helvetica" pitchFamily="34" charset="-122"/>
+                <a:cs typeface="Helvetica" pitchFamily="34" charset="-120"/>
+              </a:rPr>
+              <a:t>◆ KENAPA PROJECT, BUKAN CHAT BIASA</a:t>
+            </a:r>
+            <a:endParaRPr lang="en-US" sz="1150" dirty="0"/>
+          </a:p>
+        </p:txBody>
+      </p:sp>
+      <p:sp>
+        <p:nvSpPr>
+          <p:cNvPr id="13" name="Text 11"/>
+          <p:cNvSpPr txBox="1"/>
+          <p:nvPr/>
+        </p:nvSpPr>
+        <p:spPr>
+          <a:xfrm>
+            <a:off x="704088" y="3395281"/>
+            <a:ext cx="10780776" cy="547687"/>
+          </a:xfrm>
+          <a:prstGeom prst="rect">
+            <a:avLst/>
+          </a:prstGeom>
+          <a:noFill/>
+          <a:ln/>
+        </p:spPr>
+        <p:txBody>
+          <a:bodyPr wrap="square" lIns="0" tIns="0" rIns="0" bIns="0" rtlCol="0" anchor="ctr"/>
+          <a:lstStyle/>
+          <a:p>
+            <a:pPr marL="0" indent="0">
+              <a:lnSpc>
+                <a:spcPct val="125000"/>
+              </a:lnSpc>
+              <a:buNone/>
+            </a:pPr>
+            <a:r>
+              <a:rPr lang="en-US" sz="1150" dirty="0">
+                <a:solidFill>
+                  <a:srgbClr val="23283A"/>
+                </a:solidFill>
+                <a:latin typeface="Helvetica" pitchFamily="34" charset="0"/>
+                <a:ea typeface="Helvetica" pitchFamily="34" charset="-122"/>
+                <a:cs typeface="Helvetica" pitchFamily="34" charset="-120"/>
+              </a:rPr>
+              <a:t>Project memberi kamu satu tempat untuk menyimpan file referensi (sitemap, daftar produk) yang bisa diakses Claude di percakapan manapun di project itu — gratis, tanpa paket berbayar. Kerjakan semua modul dalam satu percakapan yang sama di dalam Project itu, supaya Claude tetap ingat kerangka desain dan datamu.</a:t>
             </a:r>
             <a:endParaRPr lang="en-US" sz="1150" dirty="0"/>
           </a:p>
@@ -5123,4 +5201,319 @@
     </a:ext>
   </a:extLst>
 </a:theme>
+</file>
+
+<file path=ppt/theme/theme2.xml><?xml version="1.0" encoding="utf-8"?>
+<a:theme xmlns:a="http://schemas.openxmlformats.org/drawingml/2006/main" name="Office Theme">
+  <a:themeElements>
+    <a:clrScheme name="Office">
+      <a:dk1>
+        <a:sysClr val="windowText" lastClr="000000"/>
+      </a:dk1>
+      <a:lt1>
+        <a:sysClr val="window" lastClr="FFFFFF"/>
+      </a:lt1>
+      <a:dk2>
+        <a:srgbClr val="0E2841"/>
+      </a:dk2>
+      <a:lt2>
+        <a:srgbClr val="E8E8E8"/>
+      </a:lt2>
+      <a:accent1>
+        <a:srgbClr val="156082"/>
+      </a:accent1>
+      <a:accent2>
+        <a:srgbClr val="E97132"/>
+      </a:accent2>
+      <a:accent3>
+        <a:srgbClr val="196B24"/>
+      </a:accent3>
+      <a:accent4>
+        <a:srgbClr val="0F9ED5"/>
+      </a:accent4>
+      <a:accent5>
+        <a:srgbClr val="A02B93"/>
+      </a:accent5>
+      <a:accent6>
+        <a:srgbClr val="4EA72E"/>
+      </a:accent6>
+      <a:hlink>
+        <a:srgbClr val="467886"/>
+      </a:hlink>
+      <a:folHlink>
+        <a:srgbClr val="96607D"/>
+      </a:folHlink>
+    </a:clrScheme>
+    <a:fontScheme name="Office">
+      <a:majorFont>
+        <a:latin typeface="Aptos Display" panose="02110004020202020204"/>
+        <a:ea typeface=""/>
+        <a:cs typeface=""/>
+        <a:font script="Jpan" typeface="游ゴシック Light"/>
+        <a:font script="Hang" typeface="맑은 고딕"/>
+        <a:font script="Hans" typeface="等线 Light"/>
+        <a:font script="Hant" typeface="新細明體"/>
+        <a:font script="Arab" typeface="Times New Roman"/>
+        <a:font script="Hebr" typeface="Times New Roman"/>
+        <a:font script="Thai" typeface="Angsana New"/>
+        <a:font script="Ethi" typeface="Nyala"/>
+        <a:font script="Beng" typeface="Vrinda"/>
+        <a:font script="Gujr" typeface="Shruti"/>
+        <a:font script="Khmr" typeface="MoolBoran"/>
+        <a:font script="Knda" typeface="Tunga"/>
+        <a:font script="Guru" typeface="Raavi"/>
+        <a:font script="Cans" typeface="Euphemia"/>
+        <a:font script="Cher" typeface="Plantagenet Cherokee"/>
+        <a:font script="Yiii" typeface="Microsoft Yi Baiti"/>
+        <a:font script="Tibt" typeface="Microsoft Himalaya"/>
+        <a:font script="Thaa" typeface="MV Boli"/>
+        <a:font script="Deva" typeface="Mangal"/>
+        <a:font script="Telu" typeface="Gautami"/>
+        <a:font script="Taml" typeface="Latha"/>
+        <a:font script="Syrc" typeface="Estrangelo Edessa"/>
+        <a:font script="Orya" typeface="Kalinga"/>
+        <a:font script="Mlym" typeface="Kartika"/>
+        <a:font script="Laoo" typeface="DokChampa"/>
+        <a:font script="Sinh" typeface="Iskoola Pota"/>
+        <a:font script="Mong" typeface="Mongolian Baiti"/>
+        <a:font script="Viet" typeface="Times New Roman"/>
+        <a:font script="Uigh" typeface="Microsoft Uighur"/>
+        <a:font script="Geor" typeface="Sylfaen"/>
+        <a:font script="Armn" typeface="Arial"/>
+        <a:font script="Bugi" typeface="Leelawadee UI"/>
+        <a:font script="Bopo" typeface="Microsoft JhengHei"/>
+        <a:font script="Java" typeface="Javanese Text"/>
+        <a:font script="Lisu" typeface="Segoe UI"/>
+        <a:font script="Mymr" typeface="Myanmar Text"/>
+        <a:font script="Nkoo" typeface="Ebrima"/>
+        <a:font script="Olck" typeface="Nirmala UI"/>
+        <a:font script="Osma" typeface="Ebrima"/>
+        <a:font script="Phag" typeface="Phagspa"/>
+        <a:font script="Syrn" typeface="Estrangelo Edessa"/>
+        <a:font script="Syrj" typeface="Estrangelo Edessa"/>
+        <a:font script="Syre" typeface="Estrangelo Edessa"/>
+        <a:font script="Sora" typeface="Nirmala UI"/>
+        <a:font script="Tale" typeface="Microsoft Tai Le"/>
+        <a:font script="Talu" typeface="Microsoft New Tai Lue"/>
+        <a:font script="Tfng" typeface="Ebrima"/>
+      </a:majorFont>
+      <a:minorFont>
+        <a:latin typeface="Aptos" panose="02110004020202020204"/>
+        <a:ea typeface=""/>
+        <a:cs typeface=""/>
+        <a:font script="Jpan" typeface="游ゴシック"/>
+        <a:font script="Hang" typeface="맑은 고딕"/>
+        <a:font script="Hans" typeface="等线"/>
+        <a:font script="Hant" typeface="新細明體"/>
+        <a:font script="Arab" typeface="Arial"/>
+        <a:font script="Hebr" typeface="Arial"/>
+        <a:font script="Thai" typeface="Cordia New"/>
+        <a:font script="Ethi" typeface="Nyala"/>
+        <a:font script="Beng" typeface="Vrinda"/>
+        <a:font script="Gujr" typeface="Shruti"/>
+        <a:font script="Khmr" typeface="DaunPenh"/>
+        <a:font script="Knda" typeface="Tunga"/>
+        <a:font script="Guru" typeface="Raavi"/>
+        <a:font script="Cans" typeface="Euphemia"/>
+        <a:font script="Cher" typeface="Plantagenet Cherokee"/>
+        <a:font script="Yiii" typeface="Microsoft Yi Baiti"/>
+        <a:font script="Tibt" typeface="Microsoft Himalaya"/>
+        <a:font script="Thaa" typeface="MV Boli"/>
+        <a:font script="Deva" typeface="Mangal"/>
+        <a:font script="Telu" typeface="Gautami"/>
+        <a:font script="Taml" typeface="Latha"/>
+        <a:font script="Syrc" typeface="Estrangelo Edessa"/>
+        <a:font script="Orya" typeface="Kalinga"/>
+        <a:font script="Mlym" typeface="Kartika"/>
+        <a:font script="Laoo" typeface="DokChampa"/>
+        <a:font script="Sinh" typeface="Iskoola Pota"/>
+        <a:font script="Mong" typeface="Mongolian Baiti"/>
+        <a:font script="Viet" typeface="Arial"/>
+        <a:font script="Uigh" typeface="Microsoft Uighur"/>
+        <a:font script="Geor" typeface="Sylfaen"/>
+        <a:font script="Armn" typeface="Arial"/>
+        <a:font script="Bugi" typeface="Leelawadee UI"/>
+        <a:font script="Bopo" typeface="Microsoft JhengHei"/>
+        <a:font script="Java" typeface="Javanese Text"/>
+        <a:font script="Lisu" typeface="Segoe UI"/>
+        <a:font script="Mymr" typeface="Myanmar Text"/>
+        <a:font script="Nkoo" typeface="Ebrima"/>
+        <a:font script="Olck" typeface="Nirmala UI"/>
+        <a:font script="Osma" typeface="Ebrima"/>
+        <a:font script="Phag" typeface="Phagspa"/>
+        <a:font script="Syrn" typeface="Estrangelo Edessa"/>
+        <a:font script="Syrj" typeface="Estrangelo Edessa"/>
+        <a:font script="Syre" typeface="Estrangelo Edessa"/>
+        <a:font script="Sora" typeface="Nirmala UI"/>
+        <a:font script="Tale" typeface="Microsoft Tai Le"/>
+        <a:font script="Talu" typeface="Microsoft New Tai Lue"/>
+        <a:font script="Tfng" typeface="Ebrima"/>
+      </a:minorFont>
+    </a:fontScheme>
+    <a:fmtScheme name="Office">
+      <a:fillStyleLst>
+        <a:solidFill>
+          <a:schemeClr val="phClr"/>
+        </a:solidFill>
+        <a:gradFill rotWithShape="1">
+          <a:gsLst>
+            <a:gs pos="0">
+              <a:schemeClr val="phClr">
+                <a:lumMod val="110000"/>
+                <a:satMod val="105000"/>
+                <a:tint val="67000"/>
+              </a:schemeClr>
+            </a:gs>
+            <a:gs pos="50000">
+              <a:schemeClr val="phClr">
+                <a:lumMod val="105000"/>
+                <a:satMod val="103000"/>
+                <a:tint val="73000"/>
+              </a:schemeClr>
+            </a:gs>
+            <a:gs pos="100000">
+              <a:schemeClr val="phClr">
+                <a:lumMod val="105000"/>
+                <a:satMod val="109000"/>
+                <a:tint val="81000"/>
+              </a:schemeClr>
+            </a:gs>
+          </a:gsLst>
+          <a:lin ang="5400000" scaled="0"/>
+        </a:gradFill>
+        <a:gradFill rotWithShape="1">
+          <a:gsLst>
+            <a:gs pos="0">
+              <a:schemeClr val="phClr">
+                <a:satMod val="103000"/>
+                <a:lumMod val="102000"/>
+                <a:tint val="94000"/>
+              </a:schemeClr>
+            </a:gs>
+            <a:gs pos="50000">
+              <a:schemeClr val="phClr">
+                <a:satMod val="110000"/>
+                <a:lumMod val="100000"/>
+                <a:shade val="100000"/>
+              </a:schemeClr>
+            </a:gs>
+            <a:gs pos="100000">
+              <a:schemeClr val="phClr">
+                <a:lumMod val="99000"/>
+                <a:satMod val="120000"/>
+                <a:shade val="78000"/>
+              </a:schemeClr>
+            </a:gs>
+          </a:gsLst>
+          <a:lin ang="5400000" scaled="0"/>
+        </a:gradFill>
+      </a:fillStyleLst>
+      <a:lnStyleLst>
+        <a:ln w="12700" cap="flat" cmpd="sng" algn="ctr">
+          <a:solidFill>
+            <a:schemeClr val="phClr"/>
+          </a:solidFill>
+          <a:prstDash val="solid"/>
+          <a:miter lim="800000"/>
+        </a:ln>
+        <a:ln w="19050" cap="flat" cmpd="sng" algn="ctr">
+          <a:solidFill>
+            <a:schemeClr val="phClr"/>
+          </a:solidFill>
+          <a:prstDash val="solid"/>
+          <a:miter lim="800000"/>
+        </a:ln>
+        <a:ln w="25400" cap="flat" cmpd="sng" algn="ctr">
+          <a:solidFill>
+            <a:schemeClr val="phClr"/>
+          </a:solidFill>
+          <a:prstDash val="solid"/>
+          <a:miter lim="800000"/>
+        </a:ln>
+      </a:lnStyleLst>
+      <a:effectStyleLst>
+        <a:effectStyle>
+          <a:effectLst/>
+        </a:effectStyle>
+        <a:effectStyle>
+          <a:effectLst/>
+        </a:effectStyle>
+        <a:effectStyle>
+          <a:effectLst>
+            <a:outerShdw blurRad="57150" dist="19050" dir="5400000" algn="ctr" rotWithShape="0">
+              <a:srgbClr val="000000">
+                <a:alpha val="63000"/>
+              </a:srgbClr>
+            </a:outerShdw>
+          </a:effectLst>
+        </a:effectStyle>
+      </a:effectStyleLst>
+      <a:bgFillStyleLst>
+        <a:solidFill>
+          <a:schemeClr val="phClr"/>
+        </a:solidFill>
+        <a:solidFill>
+          <a:schemeClr val="phClr">
+            <a:tint val="95000"/>
+            <a:satMod val="170000"/>
+          </a:schemeClr>
+        </a:solidFill>
+        <a:gradFill rotWithShape="1">
+          <a:gsLst>
+            <a:gs pos="0">
+              <a:schemeClr val="phClr">
+                <a:tint val="93000"/>
+                <a:satMod val="150000"/>
+                <a:shade val="98000"/>
+                <a:lumMod val="102000"/>
+              </a:schemeClr>
+            </a:gs>
+            <a:gs pos="50000">
+              <a:schemeClr val="phClr">
+                <a:tint val="98000"/>
+                <a:satMod val="130000"/>
+                <a:shade val="90000"/>
+                <a:lumMod val="103000"/>
+              </a:schemeClr>
+            </a:gs>
+            <a:gs pos="100000">
+              <a:schemeClr val="phClr">
+                <a:shade val="63000"/>
+                <a:satMod val="120000"/>
+              </a:schemeClr>
+            </a:gs>
+          </a:gsLst>
+          <a:lin ang="5400000" scaled="0"/>
+        </a:gradFill>
+      </a:bgFillStyleLst>
+    </a:fmtScheme>
+  </a:themeElements>
+  <a:objectDefaults>
+    <a:lnDef>
+      <a:spPr/>
+      <a:bodyPr/>
+      <a:lstStyle/>
+      <a:style>
+        <a:lnRef idx="2">
+          <a:schemeClr val="accent1"/>
+        </a:lnRef>
+        <a:fillRef idx="0">
+          <a:schemeClr val="accent1"/>
+        </a:fillRef>
+        <a:effectRef idx="1">
+          <a:schemeClr val="accent1"/>
+        </a:effectRef>
+        <a:fontRef idx="minor">
+          <a:schemeClr val="tx1"/>
+        </a:fontRef>
+      </a:style>
+    </a:lnDef>
+  </a:objectDefaults>
+  <a:extraClrSchemeLst/>
+  <a:extLst>
+    <a:ext uri="{05A4C25C-085E-4340-85A3-A5531E510DB2}">
+      <thm15:themeFamily xmlns:thm15="http://schemas.microsoft.com/office/thememl/2012/main" name="Office Theme" id="{2E142A2C-CD16-42D6-873A-C26D2A0506FA}" vid="{1BDDFF52-6CD6-40A5-AB3C-68EB2F1E4D0A}"/>
+    </a:ext>
+  </a:extLst>
+</a:theme>
 </file>
--- a/Bikin-Website/M01-Apa-yang-Akan-Kita-Bangun/BW-M01-Apa-yang-Akan-Kita-Bangun.pptx
+++ b/Bikin-Website/M01-Apa-yang-Akan-Kita-Bangun/BW-M01-Apa-yang-Akan-Kita-Bangun.pptx
@@ -3435,6 +3435,1027 @@
 </file>
 
 <file path=ppt/slides/slide5.xml><?xml version="1.0" encoding="utf-8"?>
+<p:sld xmlns:a="http://schemas.openxmlformats.org/drawingml/2006/main" xmlns:p="http://schemas.openxmlformats.org/presentationml/2006/main" xmlns:r="http://schemas.openxmlformats.org/officeDocument/2006/relationships">
+  <p:cSld>
+    <p:spTree>
+      <p:nvGrpSpPr>
+        <p:cNvPr id="1" name=""/>
+        <p:cNvGrpSpPr/>
+        <p:nvPr/>
+      </p:nvGrpSpPr>
+      <p:grpSpPr/>
+      <p:sp>
+        <p:nvSpPr>
+          <p:cNvPr id="2" name="Shape 0"/>
+          <p:cNvSpPr/>
+          <p:nvPr/>
+        </p:nvSpPr>
+        <p:spPr>
+          <a:xfrm>
+            <a:off x="0" y="0"/>
+            <a:ext cx="12191695" cy="960120"/>
+          </a:xfrm>
+          <a:prstGeom prst="rect">
+            <a:avLst/>
+          </a:prstGeom>
+          <a:solidFill>
+            <a:srgbClr val="0D1321"/>
+          </a:solidFill>
+          <a:ln/>
+        </p:spPr>
+        <p:txBody>
+          <a:bodyPr/>
+          <a:lstStyle/>
+          <a:p>
+            <a:endParaRPr lang="en-ID"/>
+          </a:p>
+        </p:txBody>
+      </p:sp>
+      <p:sp>
+        <p:nvSpPr>
+          <p:cNvPr id="3" name="Shape 1"/>
+          <p:cNvSpPr/>
+          <p:nvPr/>
+        </p:nvSpPr>
+        <p:spPr>
+          <a:xfrm>
+            <a:off x="0" y="960120"/>
+            <a:ext cx="12191695" cy="41148"/>
+          </a:xfrm>
+          <a:prstGeom prst="rect">
+            <a:avLst/>
+          </a:prstGeom>
+          <a:solidFill>
+            <a:srgbClr val="6849F6"/>
+          </a:solidFill>
+          <a:ln/>
+        </p:spPr>
+        <p:txBody>
+          <a:bodyPr/>
+          <a:lstStyle/>
+          <a:p>
+            <a:endParaRPr lang="en-ID"/>
+          </a:p>
+        </p:txBody>
+      </p:sp>
+      <p:sp>
+        <p:nvSpPr>
+          <p:cNvPr id="4" name="Text 2"/>
+          <p:cNvSpPr txBox="1"/>
+          <p:nvPr/>
+        </p:nvSpPr>
+        <p:spPr>
+          <a:xfrm>
+            <a:off x="502920" y="256032"/>
+            <a:ext cx="3657600" cy="457200"/>
+          </a:xfrm>
+          <a:prstGeom prst="rect">
+            <a:avLst/>
+          </a:prstGeom>
+          <a:noFill/>
+          <a:ln/>
+        </p:spPr>
+        <p:txBody>
+          <a:bodyPr wrap="square" lIns="0" tIns="0" rIns="0" bIns="0" rtlCol="0" anchor="ctr"/>
+          <a:lstStyle/>
+          <a:p>
+            <a:pPr marL="0" indent="0">
+              <a:buNone/>
+            </a:pPr>
+            <a:r>
+              <a:rPr lang="en-US" sz="2000" b="1" dirty="0">
+                <a:solidFill>
+                  <a:srgbClr val="FFFFFF"/>
+                </a:solidFill>
+                <a:latin typeface="Helvetica" pitchFamily="34" charset="0"/>
+                <a:ea typeface="Helvetica" pitchFamily="34" charset="-122"/>
+                <a:cs typeface="Helvetica" pitchFamily="34" charset="-120"/>
+              </a:rPr>
+              <a:t>belajar</a:t>
+            </a:r>
+            <a:r>
+              <a:rPr lang="en-US" sz="2000" b="1" dirty="0">
+                <a:solidFill>
+                  <a:srgbClr val="8B7CF6"/>
+                </a:solidFill>
+                <a:latin typeface="Helvetica" pitchFamily="34" charset="0"/>
+                <a:ea typeface="Helvetica" pitchFamily="34" charset="-122"/>
+                <a:cs typeface="Helvetica" pitchFamily="34" charset="-120"/>
+              </a:rPr>
+              <a:t>claude</a:t>
+            </a:r>
+            <a:endParaRPr lang="en-US" sz="2000" dirty="0"/>
+          </a:p>
+        </p:txBody>
+      </p:sp>
+      <p:sp>
+        <p:nvSpPr>
+          <p:cNvPr id="5" name="Text 3"/>
+          <p:cNvSpPr txBox="1"/>
+          <p:nvPr/>
+        </p:nvSpPr>
+        <p:spPr>
+          <a:xfrm>
+            <a:off x="5029200" y="274320"/>
+            <a:ext cx="6675120" cy="411480"/>
+          </a:xfrm>
+          <a:prstGeom prst="rect">
+            <a:avLst/>
+          </a:prstGeom>
+          <a:noFill/>
+          <a:ln/>
+        </p:spPr>
+        <p:txBody>
+          <a:bodyPr wrap="square" lIns="0" tIns="0" rIns="0" bIns="0" rtlCol="0" anchor="ctr"/>
+          <a:lstStyle/>
+          <a:p>
+            <a:pPr marL="0" indent="0" algn="r">
+              <a:buNone/>
+            </a:pPr>
+            <a:r>
+              <a:rPr lang="en-US" sz="1250" dirty="0">
+                <a:solidFill>
+                  <a:srgbClr val="9AA2B4"/>
+                </a:solidFill>
+                <a:latin typeface="Helvetica" pitchFamily="34" charset="0"/>
+                <a:ea typeface="Helvetica" pitchFamily="34" charset="-122"/>
+                <a:cs typeface="Helvetica" pitchFamily="34" charset="-120"/>
+              </a:rPr>
+              <a:t>Modul 1 — Apa yang Akan Kita Bangun</a:t>
+            </a:r>
+            <a:endParaRPr lang="en-US" sz="1250" dirty="0"/>
+          </a:p>
+        </p:txBody>
+      </p:sp>
+      <p:sp>
+        <p:nvSpPr>
+          <p:cNvPr id="6" name="Text 4"/>
+          <p:cNvSpPr txBox="1"/>
+          <p:nvPr/>
+        </p:nvSpPr>
+        <p:spPr>
+          <a:xfrm>
+            <a:off x="502920" y="1234440"/>
+            <a:ext cx="11155680" cy="502920"/>
+          </a:xfrm>
+          <a:prstGeom prst="rect">
+            <a:avLst/>
+          </a:prstGeom>
+          <a:noFill/>
+          <a:ln/>
+        </p:spPr>
+        <p:txBody>
+          <a:bodyPr wrap="square" lIns="0" tIns="0" rIns="0" bIns="0" rtlCol="0" anchor="ctr"/>
+          <a:lstStyle/>
+          <a:p>
+            <a:pPr marL="0" indent="0">
+              <a:buNone/>
+            </a:pPr>
+            <a:r>
+              <a:rPr lang="en-US" sz="2200" b="1" dirty="0">
+                <a:solidFill>
+                  <a:srgbClr val="0D1321"/>
+                </a:solidFill>
+                <a:latin typeface="Helvetica" pitchFamily="34" charset="0"/>
+                <a:ea typeface="Helvetica" pitchFamily="34" charset="-122"/>
+                <a:cs typeface="Helvetica" pitchFamily="34" charset="-120"/>
+              </a:rPr>
+              <a:t>Siapkan Claude Project Sebelum Mulai</a:t>
+            </a:r>
+            <a:endParaRPr lang="en-US" sz="2200" dirty="0"/>
+          </a:p>
+        </p:txBody>
+      </p:sp>
+      <p:sp>
+        <p:nvSpPr>
+          <p:cNvPr id="8" name="Text 6"/>
+          <p:cNvSpPr txBox="1"/>
+          <p:nvPr/>
+        </p:nvSpPr>
+        <p:spPr>
+          <a:xfrm>
+            <a:off x="502920" y="1965960"/>
+            <a:ext cx="11155680" cy="642937"/>
+          </a:xfrm>
+          <a:prstGeom prst="rect">
+            <a:avLst/>
+          </a:prstGeom>
+          <a:noFill/>
+          <a:ln/>
+        </p:spPr>
+        <p:txBody>
+          <a:bodyPr wrap="square" lIns="0" tIns="0" rIns="0" bIns="0" rtlCol="0" anchor="ctr"/>
+          <a:lstStyle/>
+          <a:p>
+            <a:pPr marL="0" indent="0">
+              <a:lnSpc>
+                <a:spcPct val="125000"/>
+              </a:lnSpc>
+              <a:buNone/>
+            </a:pPr>
+            <a:r>
+              <a:rPr lang="en-US" sz="1350" dirty="0">
+                <a:solidFill>
+                  <a:srgbClr val="23283A"/>
+                </a:solidFill>
+                <a:latin typeface="Helvetica" pitchFamily="34" charset="0"/>
+                <a:ea typeface="Helvetica" pitchFamily="34" charset="-122"/>
+                <a:cs typeface="Helvetica" pitchFamily="34" charset="-120"/>
+              </a:rPr>
+              <a:t>Kursus ini berjalan lintas beberapa modul, dan tiap modul memakai hasil dari modul sebelumnya — sitemap dari Modul 2, kerangka desain dari Modul 3, dan seterusnya. Supaya semuanya nggak tercecer di chat yang berbeda-beda, buat satu Project di Claude khusus untuk situsmu (misalnya “Katalog Toko Roti”) sebelum mulai Modul 2.</a:t>
+            </a:r>
+            <a:endParaRPr lang="en-US" sz="1350" dirty="0"/>
+          </a:p>
+        </p:txBody>
+      </p:sp>
+      <p:sp>
+        <p:nvSpPr>
+          <p:cNvPr id="11" name="Shape 9"/>
+          <p:cNvSpPr/>
+          <p:nvPr/>
+        </p:nvSpPr>
+        <p:spPr>
+          <a:xfrm>
+            <a:off x="502920" y="4378260"/>
+            <a:ext cx="11183112" cy="1260919"/>
+          </a:xfrm>
+          <a:prstGeom prst="roundRect">
+            <a:avLst>
+              <a:gd name="adj" fmla="val 7252"/>
+            </a:avLst>
+          </a:prstGeom>
+          <a:solidFill>
+            <a:srgbClr val="F3F0FF"/>
+          </a:solidFill>
+          <a:ln w="12700">
+            <a:solidFill>
+              <a:srgbClr val="DCD3FB"/>
+            </a:solidFill>
+            <a:prstDash val="solid"/>
+          </a:ln>
+        </p:spPr>
+        <p:txBody>
+          <a:bodyPr/>
+          <a:lstStyle/>
+          <a:p>
+            <a:endParaRPr lang="en-ID"/>
+          </a:p>
+        </p:txBody>
+      </p:sp>
+      <p:sp>
+        <p:nvSpPr>
+          <p:cNvPr id="12" name="Text 10"/>
+          <p:cNvSpPr txBox="1"/>
+          <p:nvPr/>
+        </p:nvSpPr>
+        <p:spPr>
+          <a:xfrm>
+            <a:off x="704088" y="4542852"/>
+            <a:ext cx="10780776" cy="256032"/>
+          </a:xfrm>
+          <a:prstGeom prst="rect">
+            <a:avLst/>
+          </a:prstGeom>
+          <a:noFill/>
+          <a:ln/>
+        </p:spPr>
+        <p:txBody>
+          <a:bodyPr wrap="square" lIns="0" tIns="0" rIns="0" bIns="0" rtlCol="0" anchor="ctr"/>
+          <a:lstStyle/>
+          <a:p>
+            <a:pPr marL="0" indent="0">
+              <a:buNone/>
+            </a:pPr>
+            <a:r>
+              <a:rPr lang="en-US" sz="1150" b="1" kern="0" spc="30" dirty="0">
+                <a:solidFill>
+                  <a:srgbClr val="4B36C7"/>
+                </a:solidFill>
+                <a:latin typeface="Helvetica" pitchFamily="34" charset="0"/>
+                <a:ea typeface="Helvetica" pitchFamily="34" charset="-122"/>
+                <a:cs typeface="Helvetica" pitchFamily="34" charset="-120"/>
+              </a:rPr>
+              <a:t>◆ KENAPA PROJECT, BUKAN CHAT BIASA</a:t>
+            </a:r>
+            <a:endParaRPr lang="en-US" sz="1150" dirty="0"/>
+          </a:p>
+        </p:txBody>
+      </p:sp>
+      <p:sp>
+        <p:nvSpPr>
+          <p:cNvPr id="13" name="Text 11"/>
+          <p:cNvSpPr txBox="1"/>
+          <p:nvPr/>
+        </p:nvSpPr>
+        <p:spPr>
+          <a:xfrm>
+            <a:off x="704088" y="4890324"/>
+            <a:ext cx="10780776" cy="547687"/>
+          </a:xfrm>
+          <a:prstGeom prst="rect">
+            <a:avLst/>
+          </a:prstGeom>
+          <a:noFill/>
+          <a:ln/>
+        </p:spPr>
+        <p:txBody>
+          <a:bodyPr wrap="square" lIns="0" tIns="0" rIns="0" bIns="0" rtlCol="0" anchor="ctr"/>
+          <a:lstStyle/>
+          <a:p>
+            <a:pPr marL="0" indent="0">
+              <a:lnSpc>
+                <a:spcPct val="125000"/>
+              </a:lnSpc>
+              <a:buNone/>
+            </a:pPr>
+            <a:r>
+              <a:rPr lang="en-US" sz="1150" dirty="0">
+                <a:solidFill>
+                  <a:srgbClr val="23283A"/>
+                </a:solidFill>
+                <a:latin typeface="Helvetica" pitchFamily="34" charset="0"/>
+                <a:ea typeface="Helvetica" pitchFamily="34" charset="-122"/>
+                <a:cs typeface="Helvetica" pitchFamily="34" charset="-120"/>
+              </a:rPr>
+              <a:t>Project memberi kamu satu tempat untuk menyimpan file referensi (sitemap, daftar produk) yang bisa diakses Claude di percakapan manapun di project itu — gratis, tanpa paket berbayar. Kerjakan semua modul dalam satu percakapan yang sama di dalam Project itu, supaya Claude tetap ingat kerangka desain dan datamu.</a:t>
+            </a:r>
+            <a:endParaRPr lang="en-US" sz="1150" dirty="0"/>
+          </a:p>
+        </p:txBody>
+      </p:sp>
+      <p:sp>
+        <p:nvSpPr>
+          <p:cNvPr id="14" name="Rounded Rectangle 13"/>
+          <p:cNvSpPr/>
+          <p:nvPr/>
+        </p:nvSpPr>
+        <p:spPr>
+          <a:xfrm>
+            <a:off x="502920" y="2837497"/>
+            <a:ext cx="2638044" cy="1312163"/>
+          </a:xfrm>
+          <a:prstGeom prst="roundRect">
+            <a:avLst>
+              <a:gd name="adj" fmla="val 6969"/>
+            </a:avLst>
+          </a:prstGeom>
+          <a:solidFill>
+            <a:srgbClr val="F4F6FB"/>
+          </a:solidFill>
+          <a:ln w="12700">
+            <a:solidFill>
+              <a:srgbClr val="D6DCEB"/>
+            </a:solidFill>
+          </a:ln>
+          <a:effectLst/>
+        </p:spPr>
+        <p:style>
+          <a:lnRef idx="1">
+            <a:schemeClr val="accent1"/>
+          </a:lnRef>
+          <a:fillRef idx="3">
+            <a:schemeClr val="accent1"/>
+          </a:fillRef>
+          <a:effectRef idx="2">
+            <a:schemeClr val="accent1"/>
+          </a:effectRef>
+          <a:fontRef idx="minor">
+            <a:schemeClr val="lt1"/>
+          </a:fontRef>
+        </p:style>
+        <p:txBody>
+          <a:bodyPr rtlCol="0" anchor="ctr"/>
+          <a:lstStyle/>
+          <a:p>
+            <a:pPr algn="ctr"/>
+          </a:p>
+        </p:txBody>
+      </p:sp>
+      <p:sp>
+        <p:nvSpPr>
+          <p:cNvPr id="15" name="Oval 14"/>
+          <p:cNvSpPr/>
+          <p:nvPr/>
+        </p:nvSpPr>
+        <p:spPr>
+          <a:xfrm>
+            <a:off x="667512" y="2983801"/>
+            <a:ext cx="365760" cy="365760"/>
+          </a:xfrm>
+          <a:prstGeom prst="ellipse">
+            <a:avLst/>
+          </a:prstGeom>
+          <a:solidFill>
+            <a:srgbClr val="6849F6"/>
+          </a:solidFill>
+          <a:ln>
+            <a:noFill/>
+          </a:ln>
+          <a:effectLst/>
+        </p:spPr>
+        <p:style>
+          <a:lnRef idx="1">
+            <a:schemeClr val="accent1"/>
+          </a:lnRef>
+          <a:fillRef idx="3">
+            <a:schemeClr val="accent1"/>
+          </a:fillRef>
+          <a:effectRef idx="2">
+            <a:schemeClr val="accent1"/>
+          </a:effectRef>
+          <a:fontRef idx="minor">
+            <a:schemeClr val="lt1"/>
+          </a:fontRef>
+        </p:style>
+        <p:txBody>
+          <a:bodyPr rtlCol="0" anchor="ctr"/>
+          <a:lstStyle/>
+          <a:p>
+            <a:pPr algn="ctr"/>
+          </a:p>
+        </p:txBody>
+      </p:sp>
+      <p:sp>
+        <p:nvSpPr>
+          <p:cNvPr id="16" name="TextBox 15"/>
+          <p:cNvSpPr txBox="1"/>
+          <p:nvPr/>
+        </p:nvSpPr>
+        <p:spPr>
+          <a:xfrm>
+            <a:off x="667512" y="2983801"/>
+            <a:ext cx="365760" cy="365760"/>
+          </a:xfrm>
+          <a:prstGeom prst="rect">
+            <a:avLst/>
+          </a:prstGeom>
+          <a:noFill/>
+        </p:spPr>
+        <p:txBody>
+          <a:bodyPr wrap="square" lIns="0" rIns="0" tIns="0" bIns="0" anchor="ctr">
+            <a:spAutoFit/>
+          </a:bodyPr>
+          <a:lstStyle/>
+          <a:p>
+            <a:pPr algn="ctr"/>
+            <a:r>
+              <a:rPr sz="1500" b="1">
+                <a:solidFill>
+                  <a:srgbClr val="FFFFFF"/>
+                </a:solidFill>
+                <a:latin typeface="Helvetica"/>
+              </a:rPr>
+              <a:t>1</a:t>
+            </a:r>
+          </a:p>
+        </p:txBody>
+      </p:sp>
+      <p:sp>
+        <p:nvSpPr>
+          <p:cNvPr id="17" name="TextBox 16"/>
+          <p:cNvSpPr txBox="1"/>
+          <p:nvPr/>
+        </p:nvSpPr>
+        <p:spPr>
+          <a:xfrm>
+            <a:off x="667512" y="3441001"/>
+            <a:ext cx="2308860" cy="525780"/>
+          </a:xfrm>
+          <a:prstGeom prst="rect">
+            <a:avLst/>
+          </a:prstGeom>
+          <a:noFill/>
+        </p:spPr>
+        <p:txBody>
+          <a:bodyPr wrap="square" lIns="0" rIns="0" tIns="0" bIns="0">
+            <a:spAutoFit/>
+          </a:bodyPr>
+          <a:lstStyle/>
+          <a:p>
+            <a:pPr>
+              <a:lnSpc>
+                <a:spcPct val="120000"/>
+              </a:lnSpc>
+            </a:pPr>
+            <a:r>
+              <a:rPr sz="1150" b="0">
+                <a:solidFill>
+                  <a:srgbClr val="23283A"/>
+                </a:solidFill>
+                <a:latin typeface="Helvetica"/>
+              </a:rPr>
+              <a:t>Buka claude.ai, klik "Projects" di sidebar, lalu "+ New Project"</a:t>
+            </a:r>
+          </a:p>
+        </p:txBody>
+      </p:sp>
+      <p:sp>
+        <p:nvSpPr>
+          <p:cNvPr id="18" name="Rounded Rectangle 17"/>
+          <p:cNvSpPr/>
+          <p:nvPr/>
+        </p:nvSpPr>
+        <p:spPr>
+          <a:xfrm>
+            <a:off x="3342132" y="2837497"/>
+            <a:ext cx="2638044" cy="1312163"/>
+          </a:xfrm>
+          <a:prstGeom prst="roundRect">
+            <a:avLst>
+              <a:gd name="adj" fmla="val 6969"/>
+            </a:avLst>
+          </a:prstGeom>
+          <a:solidFill>
+            <a:srgbClr val="F4F6FB"/>
+          </a:solidFill>
+          <a:ln w="12700">
+            <a:solidFill>
+              <a:srgbClr val="D6DCEB"/>
+            </a:solidFill>
+          </a:ln>
+          <a:effectLst/>
+        </p:spPr>
+        <p:style>
+          <a:lnRef idx="1">
+            <a:schemeClr val="accent1"/>
+          </a:lnRef>
+          <a:fillRef idx="3">
+            <a:schemeClr val="accent1"/>
+          </a:fillRef>
+          <a:effectRef idx="2">
+            <a:schemeClr val="accent1"/>
+          </a:effectRef>
+          <a:fontRef idx="minor">
+            <a:schemeClr val="lt1"/>
+          </a:fontRef>
+        </p:style>
+        <p:txBody>
+          <a:bodyPr rtlCol="0" anchor="ctr"/>
+          <a:lstStyle/>
+          <a:p>
+            <a:pPr algn="ctr"/>
+          </a:p>
+        </p:txBody>
+      </p:sp>
+      <p:sp>
+        <p:nvSpPr>
+          <p:cNvPr id="19" name="Oval 18"/>
+          <p:cNvSpPr/>
+          <p:nvPr/>
+        </p:nvSpPr>
+        <p:spPr>
+          <a:xfrm>
+            <a:off x="3506724" y="2983801"/>
+            <a:ext cx="365760" cy="365760"/>
+          </a:xfrm>
+          <a:prstGeom prst="ellipse">
+            <a:avLst/>
+          </a:prstGeom>
+          <a:solidFill>
+            <a:srgbClr val="6849F6"/>
+          </a:solidFill>
+          <a:ln>
+            <a:noFill/>
+          </a:ln>
+          <a:effectLst/>
+        </p:spPr>
+        <p:style>
+          <a:lnRef idx="1">
+            <a:schemeClr val="accent1"/>
+          </a:lnRef>
+          <a:fillRef idx="3">
+            <a:schemeClr val="accent1"/>
+          </a:fillRef>
+          <a:effectRef idx="2">
+            <a:schemeClr val="accent1"/>
+          </a:effectRef>
+          <a:fontRef idx="minor">
+            <a:schemeClr val="lt1"/>
+          </a:fontRef>
+        </p:style>
+        <p:txBody>
+          <a:bodyPr rtlCol="0" anchor="ctr"/>
+          <a:lstStyle/>
+          <a:p>
+            <a:pPr algn="ctr"/>
+          </a:p>
+        </p:txBody>
+      </p:sp>
+      <p:sp>
+        <p:nvSpPr>
+          <p:cNvPr id="20" name="TextBox 19"/>
+          <p:cNvSpPr txBox="1"/>
+          <p:nvPr/>
+        </p:nvSpPr>
+        <p:spPr>
+          <a:xfrm>
+            <a:off x="3506724" y="2983801"/>
+            <a:ext cx="365760" cy="365760"/>
+          </a:xfrm>
+          <a:prstGeom prst="rect">
+            <a:avLst/>
+          </a:prstGeom>
+          <a:noFill/>
+        </p:spPr>
+        <p:txBody>
+          <a:bodyPr wrap="square" lIns="0" rIns="0" tIns="0" bIns="0" anchor="ctr">
+            <a:spAutoFit/>
+          </a:bodyPr>
+          <a:lstStyle/>
+          <a:p>
+            <a:pPr algn="ctr"/>
+            <a:r>
+              <a:rPr sz="1500" b="1">
+                <a:solidFill>
+                  <a:srgbClr val="FFFFFF"/>
+                </a:solidFill>
+                <a:latin typeface="Helvetica"/>
+              </a:rPr>
+              <a:t>2</a:t>
+            </a:r>
+          </a:p>
+        </p:txBody>
+      </p:sp>
+      <p:sp>
+        <p:nvSpPr>
+          <p:cNvPr id="21" name="TextBox 20"/>
+          <p:cNvSpPr txBox="1"/>
+          <p:nvPr/>
+        </p:nvSpPr>
+        <p:spPr>
+          <a:xfrm>
+            <a:off x="3506724" y="3441001"/>
+            <a:ext cx="2308860" cy="525780"/>
+          </a:xfrm>
+          <a:prstGeom prst="rect">
+            <a:avLst/>
+          </a:prstGeom>
+          <a:noFill/>
+        </p:spPr>
+        <p:txBody>
+          <a:bodyPr wrap="square" lIns="0" rIns="0" tIns="0" bIns="0">
+            <a:spAutoFit/>
+          </a:bodyPr>
+          <a:lstStyle/>
+          <a:p>
+            <a:pPr>
+              <a:lnSpc>
+                <a:spcPct val="120000"/>
+              </a:lnSpc>
+            </a:pPr>
+            <a:r>
+              <a:rPr sz="1150" b="0">
+                <a:solidFill>
+                  <a:srgbClr val="23283A"/>
+                </a:solidFill>
+                <a:latin typeface="Helvetica"/>
+              </a:rPr>
+              <a:t>Kasih nama, misalnya "Katalog Toko Roti"</a:t>
+            </a:r>
+          </a:p>
+        </p:txBody>
+      </p:sp>
+      <p:sp>
+        <p:nvSpPr>
+          <p:cNvPr id="22" name="Rounded Rectangle 21"/>
+          <p:cNvSpPr/>
+          <p:nvPr/>
+        </p:nvSpPr>
+        <p:spPr>
+          <a:xfrm>
+            <a:off x="6181344" y="2837497"/>
+            <a:ext cx="2638044" cy="1312163"/>
+          </a:xfrm>
+          <a:prstGeom prst="roundRect">
+            <a:avLst>
+              <a:gd name="adj" fmla="val 6969"/>
+            </a:avLst>
+          </a:prstGeom>
+          <a:solidFill>
+            <a:srgbClr val="F4F6FB"/>
+          </a:solidFill>
+          <a:ln w="12700">
+            <a:solidFill>
+              <a:srgbClr val="D6DCEB"/>
+            </a:solidFill>
+          </a:ln>
+          <a:effectLst/>
+        </p:spPr>
+        <p:style>
+          <a:lnRef idx="1">
+            <a:schemeClr val="accent1"/>
+          </a:lnRef>
+          <a:fillRef idx="3">
+            <a:schemeClr val="accent1"/>
+          </a:fillRef>
+          <a:effectRef idx="2">
+            <a:schemeClr val="accent1"/>
+          </a:effectRef>
+          <a:fontRef idx="minor">
+            <a:schemeClr val="lt1"/>
+          </a:fontRef>
+        </p:style>
+        <p:txBody>
+          <a:bodyPr rtlCol="0" anchor="ctr"/>
+          <a:lstStyle/>
+          <a:p>
+            <a:pPr algn="ctr"/>
+          </a:p>
+        </p:txBody>
+      </p:sp>
+      <p:sp>
+        <p:nvSpPr>
+          <p:cNvPr id="23" name="Oval 22"/>
+          <p:cNvSpPr/>
+          <p:nvPr/>
+        </p:nvSpPr>
+        <p:spPr>
+          <a:xfrm>
+            <a:off x="6345936" y="2983801"/>
+            <a:ext cx="365760" cy="365760"/>
+          </a:xfrm>
+          <a:prstGeom prst="ellipse">
+            <a:avLst/>
+          </a:prstGeom>
+          <a:solidFill>
+            <a:srgbClr val="6849F6"/>
+          </a:solidFill>
+          <a:ln>
+            <a:noFill/>
+          </a:ln>
+          <a:effectLst/>
+        </p:spPr>
+        <p:style>
+          <a:lnRef idx="1">
+            <a:schemeClr val="accent1"/>
+          </a:lnRef>
+          <a:fillRef idx="3">
+            <a:schemeClr val="accent1"/>
+          </a:fillRef>
+          <a:effectRef idx="2">
+            <a:schemeClr val="accent1"/>
+          </a:effectRef>
+          <a:fontRef idx="minor">
+            <a:schemeClr val="lt1"/>
+          </a:fontRef>
+        </p:style>
+        <p:txBody>
+          <a:bodyPr rtlCol="0" anchor="ctr"/>
+          <a:lstStyle/>
+          <a:p>
+            <a:pPr algn="ctr"/>
+          </a:p>
+        </p:txBody>
+      </p:sp>
+      <p:sp>
+        <p:nvSpPr>
+          <p:cNvPr id="24" name="TextBox 23"/>
+          <p:cNvSpPr txBox="1"/>
+          <p:nvPr/>
+        </p:nvSpPr>
+        <p:spPr>
+          <a:xfrm>
+            <a:off x="6345936" y="2983801"/>
+            <a:ext cx="365760" cy="365760"/>
+          </a:xfrm>
+          <a:prstGeom prst="rect">
+            <a:avLst/>
+          </a:prstGeom>
+          <a:noFill/>
+        </p:spPr>
+        <p:txBody>
+          <a:bodyPr wrap="square" lIns="0" rIns="0" tIns="0" bIns="0" anchor="ctr">
+            <a:spAutoFit/>
+          </a:bodyPr>
+          <a:lstStyle/>
+          <a:p>
+            <a:pPr algn="ctr"/>
+            <a:r>
+              <a:rPr sz="1500" b="1">
+                <a:solidFill>
+                  <a:srgbClr val="FFFFFF"/>
+                </a:solidFill>
+                <a:latin typeface="Helvetica"/>
+              </a:rPr>
+              <a:t>3</a:t>
+            </a:r>
+          </a:p>
+        </p:txBody>
+      </p:sp>
+      <p:sp>
+        <p:nvSpPr>
+          <p:cNvPr id="25" name="TextBox 24"/>
+          <p:cNvSpPr txBox="1"/>
+          <p:nvPr/>
+        </p:nvSpPr>
+        <p:spPr>
+          <a:xfrm>
+            <a:off x="6345936" y="3441001"/>
+            <a:ext cx="2308860" cy="525780"/>
+          </a:xfrm>
+          <a:prstGeom prst="rect">
+            <a:avLst/>
+          </a:prstGeom>
+          <a:noFill/>
+        </p:spPr>
+        <p:txBody>
+          <a:bodyPr wrap="square" lIns="0" rIns="0" tIns="0" bIns="0">
+            <a:spAutoFit/>
+          </a:bodyPr>
+          <a:lstStyle/>
+          <a:p>
+            <a:pPr>
+              <a:lnSpc>
+                <a:spcPct val="120000"/>
+              </a:lnSpc>
+            </a:pPr>
+            <a:r>
+              <a:rPr sz="1150" b="0">
+                <a:solidFill>
+                  <a:srgbClr val="23283A"/>
+                </a:solidFill>
+                <a:latin typeface="Helvetica"/>
+              </a:rPr>
+              <a:t>Klik "New chat" di dalam project itu — pakai chat ini untuk semua modul</a:t>
+            </a:r>
+          </a:p>
+        </p:txBody>
+      </p:sp>
+      <p:sp>
+        <p:nvSpPr>
+          <p:cNvPr id="26" name="Rounded Rectangle 25"/>
+          <p:cNvSpPr/>
+          <p:nvPr/>
+        </p:nvSpPr>
+        <p:spPr>
+          <a:xfrm>
+            <a:off x="9020556" y="2837497"/>
+            <a:ext cx="2638044" cy="1312163"/>
+          </a:xfrm>
+          <a:prstGeom prst="roundRect">
+            <a:avLst>
+              <a:gd name="adj" fmla="val 6969"/>
+            </a:avLst>
+          </a:prstGeom>
+          <a:solidFill>
+            <a:srgbClr val="F4F6FB"/>
+          </a:solidFill>
+          <a:ln w="12700">
+            <a:solidFill>
+              <a:srgbClr val="D6DCEB"/>
+            </a:solidFill>
+          </a:ln>
+          <a:effectLst/>
+        </p:spPr>
+        <p:style>
+          <a:lnRef idx="1">
+            <a:schemeClr val="accent1"/>
+          </a:lnRef>
+          <a:fillRef idx="3">
+            <a:schemeClr val="accent1"/>
+          </a:fillRef>
+          <a:effectRef idx="2">
+            <a:schemeClr val="accent1"/>
+          </a:effectRef>
+          <a:fontRef idx="minor">
+            <a:schemeClr val="lt1"/>
+          </a:fontRef>
+        </p:style>
+        <p:txBody>
+          <a:bodyPr rtlCol="0" anchor="ctr"/>
+          <a:lstStyle/>
+          <a:p>
+            <a:pPr algn="ctr"/>
+          </a:p>
+        </p:txBody>
+      </p:sp>
+      <p:sp>
+        <p:nvSpPr>
+          <p:cNvPr id="27" name="Oval 26"/>
+          <p:cNvSpPr/>
+          <p:nvPr/>
+        </p:nvSpPr>
+        <p:spPr>
+          <a:xfrm>
+            <a:off x="9185148" y="2983801"/>
+            <a:ext cx="365760" cy="365760"/>
+          </a:xfrm>
+          <a:prstGeom prst="ellipse">
+            <a:avLst/>
+          </a:prstGeom>
+          <a:solidFill>
+            <a:srgbClr val="6849F6"/>
+          </a:solidFill>
+          <a:ln>
+            <a:noFill/>
+          </a:ln>
+          <a:effectLst/>
+        </p:spPr>
+        <p:style>
+          <a:lnRef idx="1">
+            <a:schemeClr val="accent1"/>
+          </a:lnRef>
+          <a:fillRef idx="3">
+            <a:schemeClr val="accent1"/>
+          </a:fillRef>
+          <a:effectRef idx="2">
+            <a:schemeClr val="accent1"/>
+          </a:effectRef>
+          <a:fontRef idx="minor">
+            <a:schemeClr val="lt1"/>
+          </a:fontRef>
+        </p:style>
+        <p:txBody>
+          <a:bodyPr rtlCol="0" anchor="ctr"/>
+          <a:lstStyle/>
+          <a:p>
+            <a:pPr algn="ctr"/>
+          </a:p>
+        </p:txBody>
+      </p:sp>
+      <p:sp>
+        <p:nvSpPr>
+          <p:cNvPr id="28" name="TextBox 27"/>
+          <p:cNvSpPr txBox="1"/>
+          <p:nvPr/>
+        </p:nvSpPr>
+        <p:spPr>
+          <a:xfrm>
+            <a:off x="9185148" y="2983801"/>
+            <a:ext cx="365760" cy="365760"/>
+          </a:xfrm>
+          <a:prstGeom prst="rect">
+            <a:avLst/>
+          </a:prstGeom>
+          <a:noFill/>
+        </p:spPr>
+        <p:txBody>
+          <a:bodyPr wrap="square" lIns="0" rIns="0" tIns="0" bIns="0" anchor="ctr">
+            <a:spAutoFit/>
+          </a:bodyPr>
+          <a:lstStyle/>
+          <a:p>
+            <a:pPr algn="ctr"/>
+            <a:r>
+              <a:rPr sz="1500" b="1">
+                <a:solidFill>
+                  <a:srgbClr val="FFFFFF"/>
+                </a:solidFill>
+                <a:latin typeface="Helvetica"/>
+              </a:rPr>
+              <a:t>4</a:t>
+            </a:r>
+          </a:p>
+        </p:txBody>
+      </p:sp>
+      <p:sp>
+        <p:nvSpPr>
+          <p:cNvPr id="29" name="TextBox 28"/>
+          <p:cNvSpPr txBox="1"/>
+          <p:nvPr/>
+        </p:nvSpPr>
+        <p:spPr>
+          <a:xfrm>
+            <a:off x="9185148" y="3441001"/>
+            <a:ext cx="2308860" cy="525780"/>
+          </a:xfrm>
+          <a:prstGeom prst="rect">
+            <a:avLst/>
+          </a:prstGeom>
+          <a:noFill/>
+        </p:spPr>
+        <p:txBody>
+          <a:bodyPr wrap="square" lIns="0" rIns="0" tIns="0" bIns="0">
+            <a:spAutoFit/>
+          </a:bodyPr>
+          <a:lstStyle/>
+          <a:p>
+            <a:pPr>
+              <a:lnSpc>
+                <a:spcPct val="120000"/>
+              </a:lnSpc>
+            </a:pPr>
+            <a:r>
+              <a:rPr sz="1150" b="0">
+                <a:solidFill>
+                  <a:srgbClr val="23283A"/>
+                </a:solidFill>
+                <a:latin typeface="Helvetica"/>
+              </a:rPr>
+              <a:t>Nanti, upload sitemap/data produkmu ke project sebagai referensi (opsional)</a:t>
+            </a:r>
+          </a:p>
+        </p:txBody>
+      </p:sp>
+    </p:spTree>
+  </p:cSld>
+  <p:clrMapOvr>
+    <a:masterClrMapping/>
+  </p:clrMapOvr>
+</p:sld>
+</file>
+
+<file path=ppt/slides/slide6.xml><?xml version="1.0" encoding="utf-8"?>
 <p:sld xmlns:a="http://schemas.openxmlformats.org/drawingml/2006/main" xmlns:r="http://schemas.openxmlformats.org/officeDocument/2006/relationships" xmlns:p="http://schemas.openxmlformats.org/presentationml/2006/main">
   <p:cSld name="Slide 5">
     <p:bg>
@@ -3930,7 +4951,7 @@
 </p:sld>
 </file>
 
-<file path=ppt/slides/slide6.xml><?xml version="1.0" encoding="utf-8"?>
+<file path=ppt/slides/slide7.xml><?xml version="1.0" encoding="utf-8"?>
 <p:sld xmlns:a="http://schemas.openxmlformats.org/drawingml/2006/main" xmlns:r="http://schemas.openxmlformats.org/officeDocument/2006/relationships" xmlns:p="http://schemas.openxmlformats.org/presentationml/2006/main">
   <p:cSld name="Slide 6">
     <p:bg>
@@ -4538,363 +5559,6 @@
                 <a:cs typeface="Helvetica" pitchFamily="34" charset="-120"/>
               </a:rPr>
               <a:t>Satu brief singkat: jenis situs yang mau kamu bangun, target pengunjung, dan draft daftar halaman yang dibutuhkan. Ini jadi fondasi buat Modul 2.</a:t>
-            </a:r>
-            <a:endParaRPr lang="en-US" sz="1150" dirty="0"/>
-          </a:p>
-        </p:txBody>
-      </p:sp>
-    </p:spTree>
-  </p:cSld>
-  <p:clrMapOvr>
-    <a:masterClrMapping/>
-  </p:clrMapOvr>
-</p:sld>
-</file>
-
-<file path=ppt/slides/slide7.xml><?xml version="1.0" encoding="utf-8"?>
-<p:sld xmlns:a="http://schemas.openxmlformats.org/drawingml/2006/main" xmlns:p="http://schemas.openxmlformats.org/presentationml/2006/main" xmlns:r="http://schemas.openxmlformats.org/officeDocument/2006/relationships">
-  <p:cSld>
-    <p:spTree>
-      <p:nvGrpSpPr>
-        <p:cNvPr id="1" name=""/>
-        <p:cNvGrpSpPr/>
-        <p:nvPr/>
-      </p:nvGrpSpPr>
-      <p:grpSpPr/>
-      <p:sp>
-        <p:nvSpPr>
-          <p:cNvPr id="2" name="Shape 0"/>
-          <p:cNvSpPr/>
-          <p:nvPr/>
-        </p:nvSpPr>
-        <p:spPr>
-          <a:xfrm>
-            <a:off x="0" y="0"/>
-            <a:ext cx="12191695" cy="960120"/>
-          </a:xfrm>
-          <a:prstGeom prst="rect">
-            <a:avLst/>
-          </a:prstGeom>
-          <a:solidFill>
-            <a:srgbClr val="0D1321"/>
-          </a:solidFill>
-          <a:ln/>
-        </p:spPr>
-        <p:txBody>
-          <a:bodyPr/>
-          <a:lstStyle/>
-          <a:p>
-            <a:endParaRPr lang="en-ID"/>
-          </a:p>
-        </p:txBody>
-      </p:sp>
-      <p:sp>
-        <p:nvSpPr>
-          <p:cNvPr id="3" name="Shape 1"/>
-          <p:cNvSpPr/>
-          <p:nvPr/>
-        </p:nvSpPr>
-        <p:spPr>
-          <a:xfrm>
-            <a:off x="0" y="960120"/>
-            <a:ext cx="12191695" cy="41148"/>
-          </a:xfrm>
-          <a:prstGeom prst="rect">
-            <a:avLst/>
-          </a:prstGeom>
-          <a:solidFill>
-            <a:srgbClr val="6849F6"/>
-          </a:solidFill>
-          <a:ln/>
-        </p:spPr>
-        <p:txBody>
-          <a:bodyPr/>
-          <a:lstStyle/>
-          <a:p>
-            <a:endParaRPr lang="en-ID"/>
-          </a:p>
-        </p:txBody>
-      </p:sp>
-      <p:sp>
-        <p:nvSpPr>
-          <p:cNvPr id="4" name="Text 2"/>
-          <p:cNvSpPr txBox="1"/>
-          <p:nvPr/>
-        </p:nvSpPr>
-        <p:spPr>
-          <a:xfrm>
-            <a:off x="502920" y="256032"/>
-            <a:ext cx="3657600" cy="457200"/>
-          </a:xfrm>
-          <a:prstGeom prst="rect">
-            <a:avLst/>
-          </a:prstGeom>
-          <a:noFill/>
-          <a:ln/>
-        </p:spPr>
-        <p:txBody>
-          <a:bodyPr wrap="square" lIns="0" tIns="0" rIns="0" bIns="0" rtlCol="0" anchor="ctr"/>
-          <a:lstStyle/>
-          <a:p>
-            <a:pPr marL="0" indent="0">
-              <a:buNone/>
-            </a:pPr>
-            <a:r>
-              <a:rPr lang="en-US" sz="2000" b="1" dirty="0">
-                <a:solidFill>
-                  <a:srgbClr val="FFFFFF"/>
-                </a:solidFill>
-                <a:latin typeface="Helvetica" pitchFamily="34" charset="0"/>
-                <a:ea typeface="Helvetica" pitchFamily="34" charset="-122"/>
-                <a:cs typeface="Helvetica" pitchFamily="34" charset="-120"/>
-              </a:rPr>
-              <a:t>belajar</a:t>
-            </a:r>
-            <a:r>
-              <a:rPr lang="en-US" sz="2000" b="1" dirty="0">
-                <a:solidFill>
-                  <a:srgbClr val="8B7CF6"/>
-                </a:solidFill>
-                <a:latin typeface="Helvetica" pitchFamily="34" charset="0"/>
-                <a:ea typeface="Helvetica" pitchFamily="34" charset="-122"/>
-                <a:cs typeface="Helvetica" pitchFamily="34" charset="-120"/>
-              </a:rPr>
-              <a:t>claude</a:t>
-            </a:r>
-            <a:endParaRPr lang="en-US" sz="2000" dirty="0"/>
-          </a:p>
-        </p:txBody>
-      </p:sp>
-      <p:sp>
-        <p:nvSpPr>
-          <p:cNvPr id="5" name="Text 3"/>
-          <p:cNvSpPr txBox="1"/>
-          <p:nvPr/>
-        </p:nvSpPr>
-        <p:spPr>
-          <a:xfrm>
-            <a:off x="5029200" y="274320"/>
-            <a:ext cx="6675120" cy="411480"/>
-          </a:xfrm>
-          <a:prstGeom prst="rect">
-            <a:avLst/>
-          </a:prstGeom>
-          <a:noFill/>
-          <a:ln/>
-        </p:spPr>
-        <p:txBody>
-          <a:bodyPr wrap="square" lIns="0" tIns="0" rIns="0" bIns="0" rtlCol="0" anchor="ctr"/>
-          <a:lstStyle/>
-          <a:p>
-            <a:pPr marL="0" indent="0" algn="r">
-              <a:buNone/>
-            </a:pPr>
-            <a:r>
-              <a:rPr lang="en-US" sz="1250" dirty="0">
-                <a:solidFill>
-                  <a:srgbClr val="9AA2B4"/>
-                </a:solidFill>
-                <a:latin typeface="Helvetica" pitchFamily="34" charset="0"/>
-                <a:ea typeface="Helvetica" pitchFamily="34" charset="-122"/>
-                <a:cs typeface="Helvetica" pitchFamily="34" charset="-120"/>
-              </a:rPr>
-              <a:t>Modul 1 — Apa yang Akan Kita Bangun</a:t>
-            </a:r>
-            <a:endParaRPr lang="en-US" sz="1250" dirty="0"/>
-          </a:p>
-        </p:txBody>
-      </p:sp>
-      <p:sp>
-        <p:nvSpPr>
-          <p:cNvPr id="6" name="Text 4"/>
-          <p:cNvSpPr txBox="1"/>
-          <p:nvPr/>
-        </p:nvSpPr>
-        <p:spPr>
-          <a:xfrm>
-            <a:off x="502920" y="1234440"/>
-            <a:ext cx="11155680" cy="502920"/>
-          </a:xfrm>
-          <a:prstGeom prst="rect">
-            <a:avLst/>
-          </a:prstGeom>
-          <a:noFill/>
-          <a:ln/>
-        </p:spPr>
-        <p:txBody>
-          <a:bodyPr wrap="square" lIns="0" tIns="0" rIns="0" bIns="0" rtlCol="0" anchor="ctr"/>
-          <a:lstStyle/>
-          <a:p>
-            <a:pPr marL="0" indent="0">
-              <a:buNone/>
-            </a:pPr>
-            <a:r>
-              <a:rPr lang="en-US" sz="2200" b="1" dirty="0">
-                <a:solidFill>
-                  <a:srgbClr val="0D1321"/>
-                </a:solidFill>
-                <a:latin typeface="Helvetica" pitchFamily="34" charset="0"/>
-                <a:ea typeface="Helvetica" pitchFamily="34" charset="-122"/>
-                <a:cs typeface="Helvetica" pitchFamily="34" charset="-120"/>
-              </a:rPr>
-              <a:t>Siapkan Claude Project Sebelum Mulai</a:t>
-            </a:r>
-            <a:endParaRPr lang="en-US" sz="2200" dirty="0"/>
-          </a:p>
-        </p:txBody>
-      </p:sp>
-      <p:sp>
-        <p:nvSpPr>
-          <p:cNvPr id="8" name="Text 6"/>
-          <p:cNvSpPr txBox="1"/>
-          <p:nvPr/>
-        </p:nvSpPr>
-        <p:spPr>
-          <a:xfrm>
-            <a:off x="502920" y="1965960"/>
-            <a:ext cx="11155680" cy="642937"/>
-          </a:xfrm>
-          <a:prstGeom prst="rect">
-            <a:avLst/>
-          </a:prstGeom>
-          <a:noFill/>
-          <a:ln/>
-        </p:spPr>
-        <p:txBody>
-          <a:bodyPr wrap="square" lIns="0" tIns="0" rIns="0" bIns="0" rtlCol="0" anchor="ctr"/>
-          <a:lstStyle/>
-          <a:p>
-            <a:pPr marL="0" indent="0">
-              <a:lnSpc>
-                <a:spcPct val="125000"/>
-              </a:lnSpc>
-              <a:buNone/>
-            </a:pPr>
-            <a:r>
-              <a:rPr lang="en-US" sz="1350" dirty="0">
-                <a:solidFill>
-                  <a:srgbClr val="23283A"/>
-                </a:solidFill>
-                <a:latin typeface="Helvetica" pitchFamily="34" charset="0"/>
-                <a:ea typeface="Helvetica" pitchFamily="34" charset="-122"/>
-                <a:cs typeface="Helvetica" pitchFamily="34" charset="-120"/>
-              </a:rPr>
-              <a:t>Kursus ini berjalan lintas beberapa modul, dan tiap modul memakai hasil dari modul sebelumnya — sitemap dari Modul 2, kerangka desain dari Modul 3, dan seterusnya. Supaya semuanya nggak tercecer di chat yang berbeda-beda, buat satu Project di Claude khusus untuk situsmu (misalnya “Katalog Toko Roti”) sebelum mulai Modul 2.</a:t>
-            </a:r>
-            <a:endParaRPr lang="en-US" sz="1350" dirty="0"/>
-          </a:p>
-        </p:txBody>
-      </p:sp>
-      <p:sp>
-        <p:nvSpPr>
-          <p:cNvPr id="11" name="Shape 9"/>
-          <p:cNvSpPr/>
-          <p:nvPr/>
-        </p:nvSpPr>
-        <p:spPr>
-          <a:xfrm>
-            <a:off x="502920" y="2883217"/>
-            <a:ext cx="11183112" cy="1260919"/>
-          </a:xfrm>
-          <a:prstGeom prst="roundRect">
-            <a:avLst>
-              <a:gd name="adj" fmla="val 8480"/>
-            </a:avLst>
-          </a:prstGeom>
-          <a:solidFill>
-            <a:srgbClr val="F3F0FF"/>
-          </a:solidFill>
-          <a:ln w="12700">
-            <a:solidFill>
-              <a:srgbClr val="DCD3FB"/>
-            </a:solidFill>
-            <a:prstDash val="solid"/>
-          </a:ln>
-        </p:spPr>
-        <p:txBody>
-          <a:bodyPr/>
-          <a:lstStyle/>
-          <a:p>
-            <a:endParaRPr lang="en-ID"/>
-          </a:p>
-        </p:txBody>
-      </p:sp>
-      <p:sp>
-        <p:nvSpPr>
-          <p:cNvPr id="12" name="Text 10"/>
-          <p:cNvSpPr txBox="1"/>
-          <p:nvPr/>
-        </p:nvSpPr>
-        <p:spPr>
-          <a:xfrm>
-            <a:off x="704088" y="3047809"/>
-            <a:ext cx="10780776" cy="256032"/>
-          </a:xfrm>
-          <a:prstGeom prst="rect">
-            <a:avLst/>
-          </a:prstGeom>
-          <a:noFill/>
-          <a:ln/>
-        </p:spPr>
-        <p:txBody>
-          <a:bodyPr wrap="square" lIns="0" tIns="0" rIns="0" bIns="0" rtlCol="0" anchor="ctr"/>
-          <a:lstStyle/>
-          <a:p>
-            <a:pPr marL="0" indent="0">
-              <a:buNone/>
-            </a:pPr>
-            <a:r>
-              <a:rPr lang="en-US" sz="1150" b="1" kern="0" spc="30" dirty="0">
-                <a:solidFill>
-                  <a:srgbClr val="4B36C7"/>
-                </a:solidFill>
-                <a:latin typeface="Helvetica" pitchFamily="34" charset="0"/>
-                <a:ea typeface="Helvetica" pitchFamily="34" charset="-122"/>
-                <a:cs typeface="Helvetica" pitchFamily="34" charset="-120"/>
-              </a:rPr>
-              <a:t>◆ KENAPA PROJECT, BUKAN CHAT BIASA</a:t>
-            </a:r>
-            <a:endParaRPr lang="en-US" sz="1150" dirty="0"/>
-          </a:p>
-        </p:txBody>
-      </p:sp>
-      <p:sp>
-        <p:nvSpPr>
-          <p:cNvPr id="13" name="Text 11"/>
-          <p:cNvSpPr txBox="1"/>
-          <p:nvPr/>
-        </p:nvSpPr>
-        <p:spPr>
-          <a:xfrm>
-            <a:off x="704088" y="3395281"/>
-            <a:ext cx="10780776" cy="547687"/>
-          </a:xfrm>
-          <a:prstGeom prst="rect">
-            <a:avLst/>
-          </a:prstGeom>
-          <a:noFill/>
-          <a:ln/>
-        </p:spPr>
-        <p:txBody>
-          <a:bodyPr wrap="square" lIns="0" tIns="0" rIns="0" bIns="0" rtlCol="0" anchor="ctr"/>
-          <a:lstStyle/>
-          <a:p>
-            <a:pPr marL="0" indent="0">
-              <a:lnSpc>
-                <a:spcPct val="125000"/>
-              </a:lnSpc>
-              <a:buNone/>
-            </a:pPr>
-            <a:r>
-              <a:rPr lang="en-US" sz="1150" dirty="0">
-                <a:solidFill>
-                  <a:srgbClr val="23283A"/>
-                </a:solidFill>
-                <a:latin typeface="Helvetica" pitchFamily="34" charset="0"/>
-                <a:ea typeface="Helvetica" pitchFamily="34" charset="-122"/>
-                <a:cs typeface="Helvetica" pitchFamily="34" charset="-120"/>
-              </a:rPr>
-              <a:t>Project memberi kamu satu tempat untuk menyimpan file referensi (sitemap, daftar produk) yang bisa diakses Claude di percakapan manapun di project itu — gratis, tanpa paket berbayar. Kerjakan semua modul dalam satu percakapan yang sama di dalam Project itu, supaya Claude tetap ingat kerangka desain dan datamu.</a:t>
             </a:r>
             <a:endParaRPr lang="en-US" sz="1150" dirty="0"/>
           </a:p>

--- a/Bikin-Website/M01-Apa-yang-Akan-Kita-Bangun/BW-M01-Apa-yang-Akan-Kita-Bangun.pptx
+++ b/Bikin-Website/M01-Apa-yang-Akan-Kita-Bangun/BW-M01-Apa-yang-Akan-Kita-Bangun.pptx
@@ -4276,7 +4276,7 @@
                 </a:solidFill>
                 <a:latin typeface="Helvetica"/>
               </a:rPr>
-              <a:t>Klik "New chat" di dalam project itu — pakai chat ini untuk semua modul</a:t>
+              <a:t>Mulai chat baru di dalam project itu — pakai chat ini untuk semua modul</a:t>
             </a:r>
           </a:p>
         </p:txBody>
